--- a/presentacion/Presentacion_Telemetria_Optimizacion.pptx
+++ b/presentacion/Presentacion_Telemetria_Optimizacion.pptx
@@ -5,25 +5,25 @@
     <p:sldMasterId id="2147483648" r:id="rId1"/>
   </p:sldMasterIdLst>
   <p:sldIdLst>
-    <p:sldId id="256" r:id="rId7"/>
-    <p:sldId id="257" r:id="rId8"/>
-    <p:sldId id="258" r:id="rId9"/>
-    <p:sldId id="259" r:id="rId10"/>
-    <p:sldId id="260" r:id="rId11"/>
-    <p:sldId id="261" r:id="rId12"/>
-    <p:sldId id="262" r:id="rId13"/>
-    <p:sldId id="263" r:id="rId14"/>
-    <p:sldId id="264" r:id="rId15"/>
-    <p:sldId id="265" r:id="rId16"/>
-    <p:sldId id="266" r:id="rId17"/>
-    <p:sldId id="267" r:id="rId18"/>
-    <p:sldId id="268" r:id="rId19"/>
-    <p:sldId id="269" r:id="rId20"/>
-    <p:sldId id="270" r:id="rId21"/>
-    <p:sldId id="271" r:id="rId22"/>
-    <p:sldId id="272" r:id="rId23"/>
+    <p:sldId id="256" r:id="rId2"/>
+    <p:sldId id="257" r:id="rId3"/>
+    <p:sldId id="258" r:id="rId4"/>
+    <p:sldId id="259" r:id="rId5"/>
+    <p:sldId id="260" r:id="rId6"/>
+    <p:sldId id="261" r:id="rId7"/>
+    <p:sldId id="262" r:id="rId8"/>
+    <p:sldId id="263" r:id="rId9"/>
+    <p:sldId id="264" r:id="rId10"/>
+    <p:sldId id="265" r:id="rId11"/>
+    <p:sldId id="266" r:id="rId12"/>
+    <p:sldId id="267" r:id="rId13"/>
+    <p:sldId id="268" r:id="rId14"/>
+    <p:sldId id="269" r:id="rId15"/>
+    <p:sldId id="270" r:id="rId16"/>
+    <p:sldId id="271" r:id="rId17"/>
+    <p:sldId id="272" r:id="rId18"/>
   </p:sldIdLst>
-  <p:sldSz cx="12191695" cy="6858000" type="screen4x3"/>
+  <p:sldSz cx="12192000" cy="6858000"/>
   <p:notesSz cx="6858000" cy="9144000"/>
   <p:defaultTextStyle>
     <a:defPPr>
@@ -120,6 +120,22 @@
       </a:defRPr>
     </a:lvl9pPr>
   </p:defaultTextStyle>
+  <p:extLst>
+    <p:ext uri="{EFAFB233-063F-42B5-8137-9DF3F51BA10A}">
+      <p15:sldGuideLst xmlns:p15="http://schemas.microsoft.com/office/powerpoint/2012/main">
+        <p15:guide id="1" orient="horz" pos="2160">
+          <p15:clr>
+            <a:srgbClr val="A4A3A4"/>
+          </p15:clr>
+        </p15:guide>
+        <p15:guide id="2" pos="2880">
+          <p15:clr>
+            <a:srgbClr val="A4A3A4"/>
+          </p15:clr>
+        </p15:guide>
+      </p15:sldGuideLst>
+    </p:ext>
+  </p:extLst>
 </p:presentation>
 </file>
 
@@ -161,10 +177,9 @@
           <a:lstStyle/>
           <a:p>
             <a:r>
-              <a:rPr lang="en-US" smtClean="0"/>
+              <a:rPr lang="en-US"/>
               <a:t>Click to edit Master title style</a:t>
             </a:r>
-            <a:endParaRPr lang="en-US"/>
           </a:p>
         </p:txBody>
       </p:sp>
@@ -280,10 +295,9 @@
           </a:lstStyle>
           <a:p>
             <a:r>
-              <a:rPr lang="en-US" smtClean="0"/>
+              <a:rPr lang="en-US"/>
               <a:t>Click to edit Master subtitle style</a:t>
             </a:r>
-            <a:endParaRPr lang="en-US"/>
           </a:p>
         </p:txBody>
       </p:sp>
@@ -304,7 +318,7 @@
           <a:p>
             <a:fld id="{5BCAD085-E8A6-8845-BD4E-CB4CCA059FC4}" type="datetimeFigureOut">
               <a:rPr lang="en-US" smtClean="0"/>
-              <a:t>1/27/13</a:t>
+              <a:t>9/28/2026</a:t>
             </a:fld>
             <a:endParaRPr lang="en-US"/>
           </a:p>
@@ -346,7 +360,7 @@
           <a:p>
             <a:fld id="{C1FF6DA9-008F-8B48-92A6-B652298478BF}" type="slidenum">
               <a:rPr lang="en-US" smtClean="0"/>
-              <a:t>‹#›</a:t>
+              <a:t>‹Nº›</a:t>
             </a:fld>
             <a:endParaRPr lang="en-US"/>
           </a:p>
@@ -398,10 +412,9 @@
           <a:lstStyle/>
           <a:p>
             <a:r>
-              <a:rPr lang="en-US" smtClean="0"/>
+              <a:rPr lang="en-US"/>
               <a:t>Click to edit Master title style</a:t>
             </a:r>
-            <a:endParaRPr lang="en-US"/>
           </a:p>
         </p:txBody>
       </p:sp>
@@ -422,38 +435,37 @@
           <a:p>
             <a:pPr lvl="0"/>
             <a:r>
-              <a:rPr lang="en-US" smtClean="0"/>
+              <a:rPr lang="en-US"/>
               <a:t>Click to edit Master text styles</a:t>
             </a:r>
           </a:p>
           <a:p>
             <a:pPr lvl="1"/>
             <a:r>
-              <a:rPr lang="en-US" smtClean="0"/>
+              <a:rPr lang="en-US"/>
               <a:t>Second level</a:t>
             </a:r>
           </a:p>
           <a:p>
             <a:pPr lvl="2"/>
             <a:r>
-              <a:rPr lang="en-US" smtClean="0"/>
+              <a:rPr lang="en-US"/>
               <a:t>Third level</a:t>
             </a:r>
           </a:p>
           <a:p>
             <a:pPr lvl="3"/>
             <a:r>
-              <a:rPr lang="en-US" smtClean="0"/>
+              <a:rPr lang="en-US"/>
               <a:t>Fourth level</a:t>
             </a:r>
           </a:p>
           <a:p>
             <a:pPr lvl="4"/>
             <a:r>
-              <a:rPr lang="en-US" smtClean="0"/>
+              <a:rPr lang="en-US"/>
               <a:t>Fifth level</a:t>
             </a:r>
-            <a:endParaRPr lang="en-US"/>
           </a:p>
         </p:txBody>
       </p:sp>
@@ -474,7 +486,7 @@
           <a:p>
             <a:fld id="{5BCAD085-E8A6-8845-BD4E-CB4CCA059FC4}" type="datetimeFigureOut">
               <a:rPr lang="en-US" smtClean="0"/>
-              <a:t>1/27/13</a:t>
+              <a:t>9/28/2026</a:t>
             </a:fld>
             <a:endParaRPr lang="en-US"/>
           </a:p>
@@ -516,7 +528,7 @@
           <a:p>
             <a:fld id="{C1FF6DA9-008F-8B48-92A6-B652298478BF}" type="slidenum">
               <a:rPr lang="en-US" smtClean="0"/>
-              <a:t>‹#›</a:t>
+              <a:t>‹Nº›</a:t>
             </a:fld>
             <a:endParaRPr lang="en-US"/>
           </a:p>
@@ -573,10 +585,9 @@
           <a:lstStyle/>
           <a:p>
             <a:r>
-              <a:rPr lang="en-US" smtClean="0"/>
+              <a:rPr lang="en-US"/>
               <a:t>Click to edit Master title style</a:t>
             </a:r>
-            <a:endParaRPr lang="en-US"/>
           </a:p>
         </p:txBody>
       </p:sp>
@@ -602,38 +613,37 @@
           <a:p>
             <a:pPr lvl="0"/>
             <a:r>
-              <a:rPr lang="en-US" smtClean="0"/>
+              <a:rPr lang="en-US"/>
               <a:t>Click to edit Master text styles</a:t>
             </a:r>
           </a:p>
           <a:p>
             <a:pPr lvl="1"/>
             <a:r>
-              <a:rPr lang="en-US" smtClean="0"/>
+              <a:rPr lang="en-US"/>
               <a:t>Second level</a:t>
             </a:r>
           </a:p>
           <a:p>
             <a:pPr lvl="2"/>
             <a:r>
-              <a:rPr lang="en-US" smtClean="0"/>
+              <a:rPr lang="en-US"/>
               <a:t>Third level</a:t>
             </a:r>
           </a:p>
           <a:p>
             <a:pPr lvl="3"/>
             <a:r>
-              <a:rPr lang="en-US" smtClean="0"/>
+              <a:rPr lang="en-US"/>
               <a:t>Fourth level</a:t>
             </a:r>
           </a:p>
           <a:p>
             <a:pPr lvl="4"/>
             <a:r>
-              <a:rPr lang="en-US" smtClean="0"/>
+              <a:rPr lang="en-US"/>
               <a:t>Fifth level</a:t>
             </a:r>
-            <a:endParaRPr lang="en-US"/>
           </a:p>
         </p:txBody>
       </p:sp>
@@ -654,7 +664,7 @@
           <a:p>
             <a:fld id="{5BCAD085-E8A6-8845-BD4E-CB4CCA059FC4}" type="datetimeFigureOut">
               <a:rPr lang="en-US" smtClean="0"/>
-              <a:t>1/27/13</a:t>
+              <a:t>9/28/2026</a:t>
             </a:fld>
             <a:endParaRPr lang="en-US"/>
           </a:p>
@@ -696,7 +706,7 @@
           <a:p>
             <a:fld id="{C1FF6DA9-008F-8B48-92A6-B652298478BF}" type="slidenum">
               <a:rPr lang="en-US" smtClean="0"/>
-              <a:t>‹#›</a:t>
+              <a:t>‹Nº›</a:t>
             </a:fld>
             <a:endParaRPr lang="en-US"/>
           </a:p>
@@ -748,10 +758,9 @@
           <a:lstStyle/>
           <a:p>
             <a:r>
-              <a:rPr lang="en-US" smtClean="0"/>
+              <a:rPr lang="en-US"/>
               <a:t>Click to edit Master title style</a:t>
             </a:r>
-            <a:endParaRPr lang="en-US"/>
           </a:p>
         </p:txBody>
       </p:sp>
@@ -772,38 +781,37 @@
           <a:p>
             <a:pPr lvl="0"/>
             <a:r>
-              <a:rPr lang="en-US" smtClean="0"/>
+              <a:rPr lang="en-US"/>
               <a:t>Click to edit Master text styles</a:t>
             </a:r>
           </a:p>
           <a:p>
             <a:pPr lvl="1"/>
             <a:r>
-              <a:rPr lang="en-US" smtClean="0"/>
+              <a:rPr lang="en-US"/>
               <a:t>Second level</a:t>
             </a:r>
           </a:p>
           <a:p>
             <a:pPr lvl="2"/>
             <a:r>
-              <a:rPr lang="en-US" smtClean="0"/>
+              <a:rPr lang="en-US"/>
               <a:t>Third level</a:t>
             </a:r>
           </a:p>
           <a:p>
             <a:pPr lvl="3"/>
             <a:r>
-              <a:rPr lang="en-US" smtClean="0"/>
+              <a:rPr lang="en-US"/>
               <a:t>Fourth level</a:t>
             </a:r>
           </a:p>
           <a:p>
             <a:pPr lvl="4"/>
             <a:r>
-              <a:rPr lang="en-US" smtClean="0"/>
+              <a:rPr lang="en-US"/>
               <a:t>Fifth level</a:t>
             </a:r>
-            <a:endParaRPr lang="en-US"/>
           </a:p>
         </p:txBody>
       </p:sp>
@@ -824,7 +832,7 @@
           <a:p>
             <a:fld id="{5BCAD085-E8A6-8845-BD4E-CB4CCA059FC4}" type="datetimeFigureOut">
               <a:rPr lang="en-US" smtClean="0"/>
-              <a:t>1/27/13</a:t>
+              <a:t>9/28/2026</a:t>
             </a:fld>
             <a:endParaRPr lang="en-US"/>
           </a:p>
@@ -866,7 +874,7 @@
           <a:p>
             <a:fld id="{C1FF6DA9-008F-8B48-92A6-B652298478BF}" type="slidenum">
               <a:rPr lang="en-US" smtClean="0"/>
-              <a:t>‹#›</a:t>
+              <a:t>‹Nº›</a:t>
             </a:fld>
             <a:endParaRPr lang="en-US"/>
           </a:p>
@@ -927,10 +935,9 @@
           </a:lstStyle>
           <a:p>
             <a:r>
-              <a:rPr lang="en-US" smtClean="0"/>
+              <a:rPr lang="en-US"/>
               <a:t>Click to edit Master title style</a:t>
             </a:r>
-            <a:endParaRPr lang="en-US"/>
           </a:p>
         </p:txBody>
       </p:sp>
@@ -1047,7 +1054,7 @@
           <a:p>
             <a:pPr lvl="0"/>
             <a:r>
-              <a:rPr lang="en-US" smtClean="0"/>
+              <a:rPr lang="en-US"/>
               <a:t>Click to edit Master text styles</a:t>
             </a:r>
           </a:p>
@@ -1070,7 +1077,7 @@
           <a:p>
             <a:fld id="{5BCAD085-E8A6-8845-BD4E-CB4CCA059FC4}" type="datetimeFigureOut">
               <a:rPr lang="en-US" smtClean="0"/>
-              <a:t>1/27/13</a:t>
+              <a:t>9/28/2026</a:t>
             </a:fld>
             <a:endParaRPr lang="en-US"/>
           </a:p>
@@ -1112,7 +1119,7 @@
           <a:p>
             <a:fld id="{C1FF6DA9-008F-8B48-92A6-B652298478BF}" type="slidenum">
               <a:rPr lang="en-US" smtClean="0"/>
-              <a:t>‹#›</a:t>
+              <a:t>‹Nº›</a:t>
             </a:fld>
             <a:endParaRPr lang="en-US"/>
           </a:p>
@@ -1164,10 +1171,9 @@
           <a:lstStyle/>
           <a:p>
             <a:r>
-              <a:rPr lang="en-US" smtClean="0"/>
+              <a:rPr lang="en-US"/>
               <a:t>Click to edit Master title style</a:t>
             </a:r>
-            <a:endParaRPr lang="en-US"/>
           </a:p>
         </p:txBody>
       </p:sp>
@@ -1221,38 +1227,37 @@
           <a:p>
             <a:pPr lvl="0"/>
             <a:r>
-              <a:rPr lang="en-US" smtClean="0"/>
+              <a:rPr lang="en-US"/>
               <a:t>Click to edit Master text styles</a:t>
             </a:r>
           </a:p>
           <a:p>
             <a:pPr lvl="1"/>
             <a:r>
-              <a:rPr lang="en-US" smtClean="0"/>
+              <a:rPr lang="en-US"/>
               <a:t>Second level</a:t>
             </a:r>
           </a:p>
           <a:p>
             <a:pPr lvl="2"/>
             <a:r>
-              <a:rPr lang="en-US" smtClean="0"/>
+              <a:rPr lang="en-US"/>
               <a:t>Third level</a:t>
             </a:r>
           </a:p>
           <a:p>
             <a:pPr lvl="3"/>
             <a:r>
-              <a:rPr lang="en-US" smtClean="0"/>
+              <a:rPr lang="en-US"/>
               <a:t>Fourth level</a:t>
             </a:r>
           </a:p>
           <a:p>
             <a:pPr lvl="4"/>
             <a:r>
-              <a:rPr lang="en-US" smtClean="0"/>
+              <a:rPr lang="en-US"/>
               <a:t>Fifth level</a:t>
             </a:r>
-            <a:endParaRPr lang="en-US"/>
           </a:p>
         </p:txBody>
       </p:sp>
@@ -1306,38 +1311,37 @@
           <a:p>
             <a:pPr lvl="0"/>
             <a:r>
-              <a:rPr lang="en-US" smtClean="0"/>
+              <a:rPr lang="en-US"/>
               <a:t>Click to edit Master text styles</a:t>
             </a:r>
           </a:p>
           <a:p>
             <a:pPr lvl="1"/>
             <a:r>
-              <a:rPr lang="en-US" smtClean="0"/>
+              <a:rPr lang="en-US"/>
               <a:t>Second level</a:t>
             </a:r>
           </a:p>
           <a:p>
             <a:pPr lvl="2"/>
             <a:r>
-              <a:rPr lang="en-US" smtClean="0"/>
+              <a:rPr lang="en-US"/>
               <a:t>Third level</a:t>
             </a:r>
           </a:p>
           <a:p>
             <a:pPr lvl="3"/>
             <a:r>
-              <a:rPr lang="en-US" smtClean="0"/>
+              <a:rPr lang="en-US"/>
               <a:t>Fourth level</a:t>
             </a:r>
           </a:p>
           <a:p>
             <a:pPr lvl="4"/>
             <a:r>
-              <a:rPr lang="en-US" smtClean="0"/>
+              <a:rPr lang="en-US"/>
               <a:t>Fifth level</a:t>
             </a:r>
-            <a:endParaRPr lang="en-US"/>
           </a:p>
         </p:txBody>
       </p:sp>
@@ -1358,7 +1362,7 @@
           <a:p>
             <a:fld id="{5BCAD085-E8A6-8845-BD4E-CB4CCA059FC4}" type="datetimeFigureOut">
               <a:rPr lang="en-US" smtClean="0"/>
-              <a:t>1/27/13</a:t>
+              <a:t>9/28/2026</a:t>
             </a:fld>
             <a:endParaRPr lang="en-US"/>
           </a:p>
@@ -1400,7 +1404,7 @@
           <a:p>
             <a:fld id="{C1FF6DA9-008F-8B48-92A6-B652298478BF}" type="slidenum">
               <a:rPr lang="en-US" smtClean="0"/>
-              <a:t>‹#›</a:t>
+              <a:t>‹Nº›</a:t>
             </a:fld>
             <a:endParaRPr lang="en-US"/>
           </a:p>
@@ -1456,10 +1460,9 @@
           </a:lstStyle>
           <a:p>
             <a:r>
-              <a:rPr lang="en-US" smtClean="0"/>
+              <a:rPr lang="en-US"/>
               <a:t>Click to edit Master title style</a:t>
             </a:r>
-            <a:endParaRPr lang="en-US"/>
           </a:p>
         </p:txBody>
       </p:sp>
@@ -1522,7 +1525,7 @@
           <a:p>
             <a:pPr lvl="0"/>
             <a:r>
-              <a:rPr lang="en-US" smtClean="0"/>
+              <a:rPr lang="en-US"/>
               <a:t>Click to edit Master text styles</a:t>
             </a:r>
           </a:p>
@@ -1578,38 +1581,37 @@
           <a:p>
             <a:pPr lvl="0"/>
             <a:r>
-              <a:rPr lang="en-US" smtClean="0"/>
+              <a:rPr lang="en-US"/>
               <a:t>Click to edit Master text styles</a:t>
             </a:r>
           </a:p>
           <a:p>
             <a:pPr lvl="1"/>
             <a:r>
-              <a:rPr lang="en-US" smtClean="0"/>
+              <a:rPr lang="en-US"/>
               <a:t>Second level</a:t>
             </a:r>
           </a:p>
           <a:p>
             <a:pPr lvl="2"/>
             <a:r>
-              <a:rPr lang="en-US" smtClean="0"/>
+              <a:rPr lang="en-US"/>
               <a:t>Third level</a:t>
             </a:r>
           </a:p>
           <a:p>
             <a:pPr lvl="3"/>
             <a:r>
-              <a:rPr lang="en-US" smtClean="0"/>
+              <a:rPr lang="en-US"/>
               <a:t>Fourth level</a:t>
             </a:r>
           </a:p>
           <a:p>
             <a:pPr lvl="4"/>
             <a:r>
-              <a:rPr lang="en-US" smtClean="0"/>
+              <a:rPr lang="en-US"/>
               <a:t>Fifth level</a:t>
             </a:r>
-            <a:endParaRPr lang="en-US"/>
           </a:p>
         </p:txBody>
       </p:sp>
@@ -1672,7 +1674,7 @@
           <a:p>
             <a:pPr lvl="0"/>
             <a:r>
-              <a:rPr lang="en-US" smtClean="0"/>
+              <a:rPr lang="en-US"/>
               <a:t>Click to edit Master text styles</a:t>
             </a:r>
           </a:p>
@@ -1728,38 +1730,37 @@
           <a:p>
             <a:pPr lvl="0"/>
             <a:r>
-              <a:rPr lang="en-US" smtClean="0"/>
+              <a:rPr lang="en-US"/>
               <a:t>Click to edit Master text styles</a:t>
             </a:r>
           </a:p>
           <a:p>
             <a:pPr lvl="1"/>
             <a:r>
-              <a:rPr lang="en-US" smtClean="0"/>
+              <a:rPr lang="en-US"/>
               <a:t>Second level</a:t>
             </a:r>
           </a:p>
           <a:p>
             <a:pPr lvl="2"/>
             <a:r>
-              <a:rPr lang="en-US" smtClean="0"/>
+              <a:rPr lang="en-US"/>
               <a:t>Third level</a:t>
             </a:r>
           </a:p>
           <a:p>
             <a:pPr lvl="3"/>
             <a:r>
-              <a:rPr lang="en-US" smtClean="0"/>
+              <a:rPr lang="en-US"/>
               <a:t>Fourth level</a:t>
             </a:r>
           </a:p>
           <a:p>
             <a:pPr lvl="4"/>
             <a:r>
-              <a:rPr lang="en-US" smtClean="0"/>
+              <a:rPr lang="en-US"/>
               <a:t>Fifth level</a:t>
             </a:r>
-            <a:endParaRPr lang="en-US"/>
           </a:p>
         </p:txBody>
       </p:sp>
@@ -1780,7 +1781,7 @@
           <a:p>
             <a:fld id="{5BCAD085-E8A6-8845-BD4E-CB4CCA059FC4}" type="datetimeFigureOut">
               <a:rPr lang="en-US" smtClean="0"/>
-              <a:t>1/27/13</a:t>
+              <a:t>9/28/2026</a:t>
             </a:fld>
             <a:endParaRPr lang="en-US"/>
           </a:p>
@@ -1822,7 +1823,7 @@
           <a:p>
             <a:fld id="{C1FF6DA9-008F-8B48-92A6-B652298478BF}" type="slidenum">
               <a:rPr lang="en-US" smtClean="0"/>
-              <a:t>‹#›</a:t>
+              <a:t>‹Nº›</a:t>
             </a:fld>
             <a:endParaRPr lang="en-US"/>
           </a:p>
@@ -1874,10 +1875,9 @@
           <a:lstStyle/>
           <a:p>
             <a:r>
-              <a:rPr lang="en-US" smtClean="0"/>
+              <a:rPr lang="en-US"/>
               <a:t>Click to edit Master title style</a:t>
             </a:r>
-            <a:endParaRPr lang="en-US"/>
           </a:p>
         </p:txBody>
       </p:sp>
@@ -1898,7 +1898,7 @@
           <a:p>
             <a:fld id="{5BCAD085-E8A6-8845-BD4E-CB4CCA059FC4}" type="datetimeFigureOut">
               <a:rPr lang="en-US" smtClean="0"/>
-              <a:t>1/27/13</a:t>
+              <a:t>9/28/2026</a:t>
             </a:fld>
             <a:endParaRPr lang="en-US"/>
           </a:p>
@@ -1940,7 +1940,7 @@
           <a:p>
             <a:fld id="{C1FF6DA9-008F-8B48-92A6-B652298478BF}" type="slidenum">
               <a:rPr lang="en-US" smtClean="0"/>
-              <a:t>‹#›</a:t>
+              <a:t>‹Nº›</a:t>
             </a:fld>
             <a:endParaRPr lang="en-US"/>
           </a:p>
@@ -1993,7 +1993,7 @@
           <a:p>
             <a:fld id="{5BCAD085-E8A6-8845-BD4E-CB4CCA059FC4}" type="datetimeFigureOut">
               <a:rPr lang="en-US" smtClean="0"/>
-              <a:t>1/27/13</a:t>
+              <a:t>9/28/2026</a:t>
             </a:fld>
             <a:endParaRPr lang="en-US"/>
           </a:p>
@@ -2035,7 +2035,7 @@
           <a:p>
             <a:fld id="{C1FF6DA9-008F-8B48-92A6-B652298478BF}" type="slidenum">
               <a:rPr lang="en-US" smtClean="0"/>
-              <a:t>‹#›</a:t>
+              <a:t>‹Nº›</a:t>
             </a:fld>
             <a:endParaRPr lang="en-US"/>
           </a:p>
@@ -2096,10 +2096,9 @@
           </a:lstStyle>
           <a:p>
             <a:r>
-              <a:rPr lang="en-US" smtClean="0"/>
+              <a:rPr lang="en-US"/>
               <a:t>Click to edit Master title style</a:t>
             </a:r>
-            <a:endParaRPr lang="en-US"/>
           </a:p>
         </p:txBody>
       </p:sp>
@@ -2153,38 +2152,37 @@
           <a:p>
             <a:pPr lvl="0"/>
             <a:r>
-              <a:rPr lang="en-US" smtClean="0"/>
+              <a:rPr lang="en-US"/>
               <a:t>Click to edit Master text styles</a:t>
             </a:r>
           </a:p>
           <a:p>
             <a:pPr lvl="1"/>
             <a:r>
-              <a:rPr lang="en-US" smtClean="0"/>
+              <a:rPr lang="en-US"/>
               <a:t>Second level</a:t>
             </a:r>
           </a:p>
           <a:p>
             <a:pPr lvl="2"/>
             <a:r>
-              <a:rPr lang="en-US" smtClean="0"/>
+              <a:rPr lang="en-US"/>
               <a:t>Third level</a:t>
             </a:r>
           </a:p>
           <a:p>
             <a:pPr lvl="3"/>
             <a:r>
-              <a:rPr lang="en-US" smtClean="0"/>
+              <a:rPr lang="en-US"/>
               <a:t>Fourth level</a:t>
             </a:r>
           </a:p>
           <a:p>
             <a:pPr lvl="4"/>
             <a:r>
-              <a:rPr lang="en-US" smtClean="0"/>
+              <a:rPr lang="en-US"/>
               <a:t>Fifth level</a:t>
             </a:r>
-            <a:endParaRPr lang="en-US"/>
           </a:p>
         </p:txBody>
       </p:sp>
@@ -2247,7 +2245,7 @@
           <a:p>
             <a:pPr lvl="0"/>
             <a:r>
-              <a:rPr lang="en-US" smtClean="0"/>
+              <a:rPr lang="en-US"/>
               <a:t>Click to edit Master text styles</a:t>
             </a:r>
           </a:p>
@@ -2270,7 +2268,7 @@
           <a:p>
             <a:fld id="{5BCAD085-E8A6-8845-BD4E-CB4CCA059FC4}" type="datetimeFigureOut">
               <a:rPr lang="en-US" smtClean="0"/>
-              <a:t>1/27/13</a:t>
+              <a:t>9/28/2026</a:t>
             </a:fld>
             <a:endParaRPr lang="en-US"/>
           </a:p>
@@ -2312,7 +2310,7 @@
           <a:p>
             <a:fld id="{C1FF6DA9-008F-8B48-92A6-B652298478BF}" type="slidenum">
               <a:rPr lang="en-US" smtClean="0"/>
-              <a:t>‹#›</a:t>
+              <a:t>‹Nº›</a:t>
             </a:fld>
             <a:endParaRPr lang="en-US"/>
           </a:p>
@@ -2373,10 +2371,9 @@
           </a:lstStyle>
           <a:p>
             <a:r>
-              <a:rPr lang="en-US" smtClean="0"/>
+              <a:rPr lang="en-US"/>
               <a:t>Click to edit Master title style</a:t>
             </a:r>
-            <a:endParaRPr lang="en-US"/>
           </a:p>
         </p:txBody>
       </p:sp>
@@ -2500,7 +2497,7 @@
           <a:p>
             <a:pPr lvl="0"/>
             <a:r>
-              <a:rPr lang="en-US" smtClean="0"/>
+              <a:rPr lang="en-US"/>
               <a:t>Click to edit Master text styles</a:t>
             </a:r>
           </a:p>
@@ -2523,7 +2520,7 @@
           <a:p>
             <a:fld id="{5BCAD085-E8A6-8845-BD4E-CB4CCA059FC4}" type="datetimeFigureOut">
               <a:rPr lang="en-US" smtClean="0"/>
-              <a:t>1/27/13</a:t>
+              <a:t>9/28/2026</a:t>
             </a:fld>
             <a:endParaRPr lang="en-US"/>
           </a:p>
@@ -2565,7 +2562,7 @@
           <a:p>
             <a:fld id="{C1FF6DA9-008F-8B48-92A6-B652298478BF}" type="slidenum">
               <a:rPr lang="en-US" smtClean="0"/>
-              <a:t>‹#›</a:t>
+              <a:t>‹Nº›</a:t>
             </a:fld>
             <a:endParaRPr lang="en-US"/>
           </a:p>
@@ -2632,10 +2629,9 @@
           <a:lstStyle/>
           <a:p>
             <a:r>
-              <a:rPr lang="en-US" smtClean="0"/>
+              <a:rPr lang="en-US"/>
               <a:t>Click to edit Master title style</a:t>
             </a:r>
-            <a:endParaRPr lang="en-US"/>
           </a:p>
         </p:txBody>
       </p:sp>
@@ -2666,38 +2662,37 @@
           <a:p>
             <a:pPr lvl="0"/>
             <a:r>
-              <a:rPr lang="en-US" smtClean="0"/>
+              <a:rPr lang="en-US"/>
               <a:t>Click to edit Master text styles</a:t>
             </a:r>
           </a:p>
           <a:p>
             <a:pPr lvl="1"/>
             <a:r>
-              <a:rPr lang="en-US" smtClean="0"/>
+              <a:rPr lang="en-US"/>
               <a:t>Second level</a:t>
             </a:r>
           </a:p>
           <a:p>
             <a:pPr lvl="2"/>
             <a:r>
-              <a:rPr lang="en-US" smtClean="0"/>
+              <a:rPr lang="en-US"/>
               <a:t>Third level</a:t>
             </a:r>
           </a:p>
           <a:p>
             <a:pPr lvl="3"/>
             <a:r>
-              <a:rPr lang="en-US" smtClean="0"/>
+              <a:rPr lang="en-US"/>
               <a:t>Fourth level</a:t>
             </a:r>
           </a:p>
           <a:p>
             <a:pPr lvl="4"/>
             <a:r>
-              <a:rPr lang="en-US" smtClean="0"/>
+              <a:rPr lang="en-US"/>
               <a:t>Fifth level</a:t>
             </a:r>
-            <a:endParaRPr lang="en-US"/>
           </a:p>
         </p:txBody>
       </p:sp>
@@ -2736,7 +2731,7 @@
           <a:p>
             <a:fld id="{5BCAD085-E8A6-8845-BD4E-CB4CCA059FC4}" type="datetimeFigureOut">
               <a:rPr lang="en-US" smtClean="0"/>
-              <a:t>1/27/13</a:t>
+              <a:t>9/28/2026</a:t>
             </a:fld>
             <a:endParaRPr lang="en-US"/>
           </a:p>
@@ -2814,7 +2809,7 @@
           <a:p>
             <a:fld id="{C1FF6DA9-008F-8B48-92A6-B652298478BF}" type="slidenum">
               <a:rPr lang="en-US" smtClean="0"/>
-              <a:t>‹#›</a:t>
+              <a:t>‹Nº›</a:t>
             </a:fld>
             <a:endParaRPr lang="en-US"/>
           </a:p>
@@ -3095,7 +3090,7 @@
 </file>
 
 <file path=ppt/slides/slide1.xml><?xml version="1.0" encoding="utf-8"?>
-<p:sld xmlns:a="http://schemas.openxmlformats.org/drawingml/2006/main" xmlns:p="http://schemas.openxmlformats.org/presentationml/2006/main" xmlns:r="http://schemas.openxmlformats.org/officeDocument/2006/relationships">
+<p:sld xmlns:a="http://schemas.openxmlformats.org/drawingml/2006/main" xmlns:r="http://schemas.openxmlformats.org/officeDocument/2006/relationships" xmlns:p="http://schemas.openxmlformats.org/presentationml/2006/main">
   <p:cSld>
     <p:spTree>
       <p:nvGrpSpPr>
@@ -3103,7 +3098,14 @@
         <p:cNvGrpSpPr/>
         <p:nvPr/>
       </p:nvGrpSpPr>
-      <p:grpSpPr/>
+      <p:grpSpPr>
+        <a:xfrm>
+          <a:off x="0" y="0"/>
+          <a:ext cx="0" cy="0"/>
+          <a:chOff x="0" y="0"/>
+          <a:chExt cx="0" cy="0"/>
+        </a:xfrm>
+      </p:grpSpPr>
       <p:sp>
         <p:nvSpPr>
           <p:cNvPr id="2" name="Rectangle 1"/>
@@ -3144,6 +3146,7 @@
           <a:lstStyle/>
           <a:p>
             <a:pPr algn="ctr"/>
+            <a:endParaRPr/>
           </a:p>
         </p:txBody>
       </p:sp>
@@ -3278,6 +3281,7 @@
           <a:lstStyle/>
           <a:p>
             <a:pPr algn="ctr"/>
+            <a:endParaRPr/>
           </a:p>
         </p:txBody>
       </p:sp>
@@ -3348,7 +3352,7 @@
               </a:spcAft>
             </a:pPr>
             <a:r>
-              <a:rPr b="0" sz="1200">
+              <a:rPr sz="1200" b="0">
                 <a:solidFill>
                   <a:srgbClr val="60A5FA"/>
                 </a:solidFill>
@@ -3357,7 +3361,7 @@
               <a:t>•  </a:t>
             </a:r>
             <a:r>
-              <a:rPr b="1" sz="1200">
+              <a:rPr sz="1200" b="1">
                 <a:solidFill>
                   <a:srgbClr val="E2E8F0"/>
                 </a:solidFill>
@@ -3366,7 +3370,7 @@
               <a:t>Nivel Académico: </a:t>
             </a:r>
             <a:r>
-              <a:rPr b="0" sz="1200">
+              <a:rPr sz="1200" b="0">
                 <a:solidFill>
                   <a:srgbClr val="94A3B8"/>
                 </a:solidFill>
@@ -3385,7 +3389,7 @@
               </a:spcAft>
             </a:pPr>
             <a:r>
-              <a:rPr b="0" sz="1200">
+              <a:rPr sz="1200" b="0">
                 <a:solidFill>
                   <a:srgbClr val="60A5FA"/>
                 </a:solidFill>
@@ -3394,7 +3398,7 @@
               <a:t>•  </a:t>
             </a:r>
             <a:r>
-              <a:rPr b="1" sz="1200">
+              <a:rPr sz="1200" b="1">
                 <a:solidFill>
                   <a:srgbClr val="E2E8F0"/>
                 </a:solidFill>
@@ -3403,7 +3407,7 @@
               <a:t>Paradigma: </a:t>
             </a:r>
             <a:r>
-              <a:rPr b="0" sz="1200">
+              <a:rPr sz="1200" b="0">
                 <a:solidFill>
                   <a:srgbClr val="94A3B8"/>
                 </a:solidFill>
@@ -3422,7 +3426,7 @@
               </a:spcAft>
             </a:pPr>
             <a:r>
-              <a:rPr b="0" sz="1200">
+              <a:rPr sz="1200" b="0">
                 <a:solidFill>
                   <a:srgbClr val="60A5FA"/>
                 </a:solidFill>
@@ -3431,7 +3435,7 @@
               <a:t>•  </a:t>
             </a:r>
             <a:r>
-              <a:rPr b="1" sz="1200">
+              <a:rPr sz="1200" b="1">
                 <a:solidFill>
                   <a:srgbClr val="E2E8F0"/>
                 </a:solidFill>
@@ -3440,7 +3444,7 @@
               <a:t>Motor: </a:t>
             </a:r>
             <a:r>
-              <a:rPr b="0" sz="1200">
+              <a:rPr sz="1200" b="0">
                 <a:solidFill>
                   <a:srgbClr val="94A3B8"/>
                 </a:solidFill>
@@ -3494,6 +3498,7 @@
           <a:lstStyle/>
           <a:p>
             <a:pPr algn="ctr"/>
+            <a:endParaRPr/>
           </a:p>
         </p:txBody>
       </p:sp>
@@ -3542,7 +3547,7 @@
         <p:spPr>
           <a:xfrm>
             <a:off x="6446520" y="4663440"/>
-            <a:ext cx="4754880" cy="1188720"/>
+            <a:ext cx="4754880" cy="1061829"/>
           </a:xfrm>
           <a:prstGeom prst="rect">
             <a:avLst/>
@@ -3564,7 +3569,7 @@
               </a:spcAft>
             </a:pPr>
             <a:r>
-              <a:rPr b="0" sz="1200">
+              <a:rPr sz="1200" b="0" dirty="0">
                 <a:solidFill>
                   <a:srgbClr val="60A5FA"/>
                 </a:solidFill>
@@ -3573,22 +3578,40 @@
               <a:t>•  </a:t>
             </a:r>
             <a:r>
-              <a:rPr b="1" sz="1200">
+              <a:rPr sz="1200" b="1" dirty="0" err="1">
                 <a:solidFill>
                   <a:srgbClr val="E2E8F0"/>
                 </a:solidFill>
                 <a:latin typeface="Segoe UI"/>
               </a:rPr>
-              <a:t>Integrantes: </a:t>
-            </a:r>
-            <a:r>
-              <a:rPr b="0" sz="1200">
+              <a:t>Integrantes</a:t>
+            </a:r>
+            <a:r>
+              <a:rPr sz="1200" b="1" dirty="0">
+                <a:solidFill>
+                  <a:srgbClr val="E2E8F0"/>
+                </a:solidFill>
+                <a:latin typeface="Segoe UI"/>
+              </a:rPr>
+              <a:t>: </a:t>
+            </a:r>
+            <a:r>
+              <a:rPr lang="es-EC" sz="1200" dirty="0">
+                <a:solidFill>
+                  <a:srgbClr val="E2E8F0"/>
+                </a:solidFill>
+                <a:latin typeface="Segoe UI"/>
+              </a:rPr>
+              <a:t>Emily Cayambe, Christian Chacho, </a:t>
+            </a:r>
+            <a:r>
+              <a:rPr sz="1200" b="0" dirty="0">
                 <a:solidFill>
                   <a:srgbClr val="94A3B8"/>
                 </a:solidFill>
                 <a:latin typeface="Segoe UI"/>
               </a:rPr>
-              <a:t>Zaid San Lucas y equipo de proyecto</a:t>
+              <a:t>Zaid San Lucas</a:t>
             </a:r>
           </a:p>
           <a:p>
@@ -3601,7 +3624,7 @@
               </a:spcAft>
             </a:pPr>
             <a:r>
-              <a:rPr b="0" sz="1200">
+              <a:rPr sz="1200" b="0" dirty="0">
                 <a:solidFill>
                   <a:srgbClr val="60A5FA"/>
                 </a:solidFill>
@@ -3610,22 +3633,94 @@
               <a:t>•  </a:t>
             </a:r>
             <a:r>
-              <a:rPr b="1" sz="1200">
+              <a:rPr sz="1200" b="1" dirty="0" err="1">
                 <a:solidFill>
                   <a:srgbClr val="E2E8F0"/>
                 </a:solidFill>
                 <a:latin typeface="Segoe UI"/>
               </a:rPr>
-              <a:t>Áreas de Demostración: </a:t>
-            </a:r>
-            <a:r>
-              <a:rPr b="0" sz="1200">
+              <a:t>Áreas</a:t>
+            </a:r>
+            <a:r>
+              <a:rPr sz="1200" b="1" dirty="0">
+                <a:solidFill>
+                  <a:srgbClr val="E2E8F0"/>
+                </a:solidFill>
+                <a:latin typeface="Segoe UI"/>
+              </a:rPr>
+              <a:t> de </a:t>
+            </a:r>
+            <a:r>
+              <a:rPr sz="1200" b="1" dirty="0" err="1">
+                <a:solidFill>
+                  <a:srgbClr val="E2E8F0"/>
+                </a:solidFill>
+                <a:latin typeface="Segoe UI"/>
+              </a:rPr>
+              <a:t>Demostración</a:t>
+            </a:r>
+            <a:r>
+              <a:rPr sz="1200" b="1" dirty="0">
+                <a:solidFill>
+                  <a:srgbClr val="E2E8F0"/>
+                </a:solidFill>
+                <a:latin typeface="Segoe UI"/>
+              </a:rPr>
+              <a:t>: </a:t>
+            </a:r>
+            <a:r>
+              <a:rPr sz="1200" b="0" dirty="0" err="1">
                 <a:solidFill>
                   <a:srgbClr val="94A3B8"/>
                 </a:solidFill>
                 <a:latin typeface="Segoe UI"/>
               </a:rPr>
-              <a:t>Respaldo continuo, observabilidad y afinamiento SQL</a:t>
+              <a:t>Respaldo</a:t>
+            </a:r>
+            <a:r>
+              <a:rPr sz="1200" b="0" dirty="0">
+                <a:solidFill>
+                  <a:srgbClr val="94A3B8"/>
+                </a:solidFill>
+                <a:latin typeface="Segoe UI"/>
+              </a:rPr>
+              <a:t> continuo, </a:t>
+            </a:r>
+            <a:r>
+              <a:rPr sz="1200" b="0" dirty="0" err="1">
+                <a:solidFill>
+                  <a:srgbClr val="94A3B8"/>
+                </a:solidFill>
+                <a:latin typeface="Segoe UI"/>
+              </a:rPr>
+              <a:t>observabilidad</a:t>
+            </a:r>
+            <a:r>
+              <a:rPr sz="1200" b="0" dirty="0">
+                <a:solidFill>
+                  <a:srgbClr val="94A3B8"/>
+                </a:solidFill>
+                <a:latin typeface="Segoe UI"/>
+              </a:rPr>
+              <a:t> y </a:t>
+            </a:r>
+            <a:r>
+              <a:rPr sz="1200" b="0" dirty="0" err="1">
+                <a:solidFill>
+                  <a:srgbClr val="94A3B8"/>
+                </a:solidFill>
+                <a:latin typeface="Segoe UI"/>
+              </a:rPr>
+              <a:t>afinamiento</a:t>
+            </a:r>
+            <a:r>
+              <a:rPr sz="1200" b="0" dirty="0">
+                <a:solidFill>
+                  <a:srgbClr val="94A3B8"/>
+                </a:solidFill>
+                <a:latin typeface="Segoe UI"/>
+              </a:rPr>
+              <a:t> SQL</a:t>
             </a:r>
           </a:p>
           <a:p>
@@ -3638,7 +3733,7 @@
               </a:spcAft>
             </a:pPr>
             <a:r>
-              <a:rPr b="0" sz="1200">
+              <a:rPr sz="1200" b="0" dirty="0">
                 <a:solidFill>
                   <a:srgbClr val="60A5FA"/>
                 </a:solidFill>
@@ -3647,23 +3742,92 @@
               <a:t>•  </a:t>
             </a:r>
             <a:r>
-              <a:rPr b="1" sz="1200">
+              <a:rPr sz="1200" b="1" dirty="0" err="1">
                 <a:solidFill>
                   <a:srgbClr val="E2E8F0"/>
                 </a:solidFill>
                 <a:latin typeface="Segoe UI"/>
               </a:rPr>
-              <a:t>Entorno de Pruebas: </a:t>
-            </a:r>
-            <a:r>
-              <a:rPr b="0" sz="1200">
+              <a:t>Entorno</a:t>
+            </a:r>
+            <a:r>
+              <a:rPr sz="1200" b="1" dirty="0">
+                <a:solidFill>
+                  <a:srgbClr val="E2E8F0"/>
+                </a:solidFill>
+                <a:latin typeface="Segoe UI"/>
+              </a:rPr>
+              <a:t> de </a:t>
+            </a:r>
+            <a:r>
+              <a:rPr sz="1200" b="1" dirty="0" err="1">
+                <a:solidFill>
+                  <a:srgbClr val="E2E8F0"/>
+                </a:solidFill>
+                <a:latin typeface="Segoe UI"/>
+              </a:rPr>
+              <a:t>Pruebas</a:t>
+            </a:r>
+            <a:r>
+              <a:rPr sz="1200" b="1" dirty="0">
+                <a:solidFill>
+                  <a:srgbClr val="E2E8F0"/>
+                </a:solidFill>
+                <a:latin typeface="Segoe UI"/>
+              </a:rPr>
+              <a:t>: </a:t>
+            </a:r>
+            <a:r>
+              <a:rPr sz="1200" b="0" dirty="0" err="1">
                 <a:solidFill>
                   <a:srgbClr val="94A3B8"/>
                 </a:solidFill>
                 <a:latin typeface="Segoe UI"/>
               </a:rPr>
-              <a:t>Contenedores aislados y reproducibles</a:t>
-            </a:r>
+              <a:t>Contenedores</a:t>
+            </a:r>
+            <a:r>
+              <a:rPr sz="1200" b="0" dirty="0">
+                <a:solidFill>
+                  <a:srgbClr val="94A3B8"/>
+                </a:solidFill>
+                <a:latin typeface="Segoe UI"/>
+              </a:rPr>
+              <a:t> </a:t>
+            </a:r>
+            <a:r>
+              <a:rPr sz="1200" b="0" dirty="0" err="1">
+                <a:solidFill>
+                  <a:srgbClr val="94A3B8"/>
+                </a:solidFill>
+                <a:latin typeface="Segoe UI"/>
+              </a:rPr>
+              <a:t>aislados</a:t>
+            </a:r>
+            <a:r>
+              <a:rPr sz="1200" b="0" dirty="0">
+                <a:solidFill>
+                  <a:srgbClr val="94A3B8"/>
+                </a:solidFill>
+                <a:latin typeface="Segoe UI"/>
+              </a:rPr>
+              <a:t> y </a:t>
+            </a:r>
+            <a:r>
+              <a:rPr sz="1200" b="0" dirty="0" err="1">
+                <a:solidFill>
+                  <a:srgbClr val="94A3B8"/>
+                </a:solidFill>
+                <a:latin typeface="Segoe UI"/>
+              </a:rPr>
+              <a:t>reproducibles</a:t>
+            </a:r>
+            <a:endParaRPr sz="1200" b="0" dirty="0">
+              <a:solidFill>
+                <a:srgbClr val="94A3B8"/>
+              </a:solidFill>
+              <a:latin typeface="Segoe UI"/>
+            </a:endParaRPr>
           </a:p>
         </p:txBody>
       </p:sp>
@@ -3676,7 +3840,7 @@
 </file>
 
 <file path=ppt/slides/slide10.xml><?xml version="1.0" encoding="utf-8"?>
-<p:sld xmlns:a="http://schemas.openxmlformats.org/drawingml/2006/main" xmlns:p="http://schemas.openxmlformats.org/presentationml/2006/main" xmlns:r="http://schemas.openxmlformats.org/officeDocument/2006/relationships">
+<p:sld xmlns:a="http://schemas.openxmlformats.org/drawingml/2006/main" xmlns:r="http://schemas.openxmlformats.org/officeDocument/2006/relationships" xmlns:p="http://schemas.openxmlformats.org/presentationml/2006/main">
   <p:cSld>
     <p:spTree>
       <p:nvGrpSpPr>
@@ -3684,7 +3848,14 @@
         <p:cNvGrpSpPr/>
         <p:nvPr/>
       </p:nvGrpSpPr>
-      <p:grpSpPr/>
+      <p:grpSpPr>
+        <a:xfrm>
+          <a:off x="0" y="0"/>
+          <a:ext cx="0" cy="0"/>
+          <a:chOff x="0" y="0"/>
+          <a:chExt cx="0" cy="0"/>
+        </a:xfrm>
+      </p:grpSpPr>
       <p:sp>
         <p:nvSpPr>
           <p:cNvPr id="2" name="Rectangle 1"/>
@@ -3725,6 +3896,7 @@
           <a:lstStyle/>
           <a:p>
             <a:pPr algn="ctr"/>
+            <a:endParaRPr/>
           </a:p>
         </p:txBody>
       </p:sp>
@@ -3843,6 +4015,7 @@
           <a:lstStyle/>
           <a:p>
             <a:pPr algn="ctr"/>
+            <a:endParaRPr/>
           </a:p>
         </p:txBody>
       </p:sp>
@@ -3913,7 +4086,7 @@
               </a:spcAft>
             </a:pPr>
             <a:r>
-              <a:rPr b="0" sz="1200">
+              <a:rPr sz="1200" b="0">
                 <a:solidFill>
                   <a:srgbClr val="60A5FA"/>
                 </a:solidFill>
@@ -3922,7 +4095,7 @@
               <a:t>•  </a:t>
             </a:r>
             <a:r>
-              <a:rPr b="1" sz="1200">
+              <a:rPr sz="1200" b="1">
                 <a:solidFill>
                   <a:srgbClr val="E2E8F0"/>
                 </a:solidFill>
@@ -3931,7 +4104,7 @@
               <a:t>Más allá del Hardware: </a:t>
             </a:r>
             <a:r>
-              <a:rPr b="0" sz="1200">
+              <a:rPr sz="1200" b="0">
                 <a:solidFill>
                   <a:srgbClr val="94A3B8"/>
                 </a:solidFill>
@@ -3950,7 +4123,7 @@
               </a:spcAft>
             </a:pPr>
             <a:r>
-              <a:rPr b="0" sz="1200">
+              <a:rPr sz="1200" b="0">
                 <a:solidFill>
                   <a:srgbClr val="60A5FA"/>
                 </a:solidFill>
@@ -3959,7 +4132,7 @@
               <a:t>•  </a:t>
             </a:r>
             <a:r>
-              <a:rPr b="1" sz="1200">
+              <a:rPr sz="1200" b="1">
                 <a:solidFill>
                   <a:srgbClr val="E2E8F0"/>
                 </a:solidFill>
@@ -3968,7 +4141,7 @@
               <a:t>Throughput (QPS): </a:t>
             </a:r>
             <a:r>
-              <a:rPr b="0" sz="1200">
+              <a:rPr sz="1200" b="0">
                 <a:solidFill>
                   <a:srgbClr val="94A3B8"/>
                 </a:solidFill>
@@ -3987,7 +4160,7 @@
               </a:spcAft>
             </a:pPr>
             <a:r>
-              <a:rPr b="0" sz="1200">
+              <a:rPr sz="1200" b="0">
                 <a:solidFill>
                   <a:srgbClr val="60A5FA"/>
                 </a:solidFill>
@@ -3996,7 +4169,7 @@
               <a:t>•  </a:t>
             </a:r>
             <a:r>
-              <a:rPr b="1" sz="1200">
+              <a:rPr sz="1200" b="1">
                 <a:solidFill>
                   <a:srgbClr val="E2E8F0"/>
                 </a:solidFill>
@@ -4005,7 +4178,7 @@
               <a:t>Composición DML: </a:t>
             </a:r>
             <a:r>
-              <a:rPr b="0" sz="1200">
+              <a:rPr sz="1200" b="0">
                 <a:solidFill>
                   <a:srgbClr val="94A3B8"/>
                 </a:solidFill>
@@ -4024,7 +4197,7 @@
               </a:spcAft>
             </a:pPr>
             <a:r>
-              <a:rPr b="0" sz="1200">
+              <a:rPr sz="1200" b="0">
                 <a:solidFill>
                   <a:srgbClr val="60A5FA"/>
                 </a:solidFill>
@@ -4033,7 +4206,7 @@
               <a:t>•  </a:t>
             </a:r>
             <a:r>
-              <a:rPr b="1" sz="1200">
+              <a:rPr sz="1200" b="1">
                 <a:solidFill>
                   <a:srgbClr val="E2E8F0"/>
                 </a:solidFill>
@@ -4042,7 +4215,7 @@
               <a:t>Alertas Tempranas: </a:t>
             </a:r>
             <a:r>
-              <a:rPr b="0" sz="1200">
+              <a:rPr sz="1200" b="0">
                 <a:solidFill>
                   <a:srgbClr val="94A3B8"/>
                 </a:solidFill>
@@ -4096,6 +4269,7 @@
           <a:lstStyle/>
           <a:p>
             <a:pPr algn="ctr"/>
+            <a:endParaRPr/>
           </a:p>
         </p:txBody>
       </p:sp>
@@ -4166,7 +4340,7 @@
               </a:spcAft>
             </a:pPr>
             <a:r>
-              <a:rPr b="0" sz="1200">
+              <a:rPr sz="1200" b="0">
                 <a:solidFill>
                   <a:srgbClr val="60A5FA"/>
                 </a:solidFill>
@@ -4175,7 +4349,7 @@
               <a:t>•  </a:t>
             </a:r>
             <a:r>
-              <a:rPr b="1" sz="1200">
+              <a:rPr sz="1200" b="1">
                 <a:solidFill>
                   <a:srgbClr val="E2E8F0"/>
                 </a:solidFill>
@@ -4184,7 +4358,7 @@
               <a:t>Indexación por Metadatos: </a:t>
             </a:r>
             <a:r>
-              <a:rPr b="0" sz="1200">
+              <a:rPr sz="1200" b="0">
                 <a:solidFill>
                   <a:srgbClr val="94A3B8"/>
                 </a:solidFill>
@@ -4203,7 +4377,7 @@
               </a:spcAft>
             </a:pPr>
             <a:r>
-              <a:rPr b="0" sz="1200">
+              <a:rPr sz="1200" b="0">
                 <a:solidFill>
                   <a:srgbClr val="60A5FA"/>
                 </a:solidFill>
@@ -4212,7 +4386,7 @@
               <a:t>•  </a:t>
             </a:r>
             <a:r>
-              <a:rPr b="1" sz="1200">
+              <a:rPr sz="1200" b="1">
                 <a:solidFill>
                   <a:srgbClr val="E2E8F0"/>
                 </a:solidFill>
@@ -4221,7 +4395,7 @@
               <a:t>Consumo No Invasivo: </a:t>
             </a:r>
             <a:r>
-              <a:rPr b="0" sz="1200">
+              <a:rPr sz="1200" b="0">
                 <a:solidFill>
                   <a:srgbClr val="94A3B8"/>
                 </a:solidFill>
@@ -4240,7 +4414,7 @@
               </a:spcAft>
             </a:pPr>
             <a:r>
-              <a:rPr b="0" sz="1200">
+              <a:rPr sz="1200" b="0">
                 <a:solidFill>
                   <a:srgbClr val="60A5FA"/>
                 </a:solidFill>
@@ -4249,7 +4423,7 @@
               <a:t>•  </a:t>
             </a:r>
             <a:r>
-              <a:rPr b="1" sz="1200">
+              <a:rPr sz="1200" b="1">
                 <a:solidFill>
                   <a:srgbClr val="E2E8F0"/>
                 </a:solidFill>
@@ -4258,7 +4432,7 @@
               <a:t>Visibilidad Central: </a:t>
             </a:r>
             <a:r>
-              <a:rPr b="0" sz="1200">
+              <a:rPr sz="1200" b="0">
                 <a:solidFill>
                   <a:srgbClr val="94A3B8"/>
                 </a:solidFill>
@@ -4277,7 +4451,7 @@
               </a:spcAft>
             </a:pPr>
             <a:r>
-              <a:rPr b="0" sz="1200">
+              <a:rPr sz="1200" b="0">
                 <a:solidFill>
                   <a:srgbClr val="60A5FA"/>
                 </a:solidFill>
@@ -4286,7 +4460,7 @@
               <a:t>•  </a:t>
             </a:r>
             <a:r>
-              <a:rPr b="1" sz="1200">
+              <a:rPr sz="1200" b="1">
                 <a:solidFill>
                   <a:srgbClr val="E2E8F0"/>
                 </a:solidFill>
@@ -4295,7 +4469,7 @@
               <a:t>Retención Independiente: </a:t>
             </a:r>
             <a:r>
-              <a:rPr b="0" sz="1200">
+              <a:rPr sz="1200" b="0">
                 <a:solidFill>
                   <a:srgbClr val="94A3B8"/>
                 </a:solidFill>
@@ -4315,7 +4489,7 @@
 </file>
 
 <file path=ppt/slides/slide11.xml><?xml version="1.0" encoding="utf-8"?>
-<p:sld xmlns:a="http://schemas.openxmlformats.org/drawingml/2006/main" xmlns:p="http://schemas.openxmlformats.org/presentationml/2006/main" xmlns:r="http://schemas.openxmlformats.org/officeDocument/2006/relationships">
+<p:sld xmlns:a="http://schemas.openxmlformats.org/drawingml/2006/main" xmlns:r="http://schemas.openxmlformats.org/officeDocument/2006/relationships" xmlns:p="http://schemas.openxmlformats.org/presentationml/2006/main">
   <p:cSld>
     <p:spTree>
       <p:nvGrpSpPr>
@@ -4323,7 +4497,14 @@
         <p:cNvGrpSpPr/>
         <p:nvPr/>
       </p:nvGrpSpPr>
-      <p:grpSpPr/>
+      <p:grpSpPr>
+        <a:xfrm>
+          <a:off x="0" y="0"/>
+          <a:ext cx="0" cy="0"/>
+          <a:chOff x="0" y="0"/>
+          <a:chExt cx="0" cy="0"/>
+        </a:xfrm>
+      </p:grpSpPr>
       <p:sp>
         <p:nvSpPr>
           <p:cNvPr id="2" name="Rectangle 1"/>
@@ -4364,6 +4545,7 @@
           <a:lstStyle/>
           <a:p>
             <a:pPr algn="ctr"/>
+            <a:endParaRPr/>
           </a:p>
         </p:txBody>
       </p:sp>
@@ -4482,6 +4664,7 @@
           <a:lstStyle/>
           <a:p>
             <a:pPr algn="ctr"/>
+            <a:endParaRPr/>
           </a:p>
         </p:txBody>
       </p:sp>
@@ -4552,7 +4735,7 @@
               </a:spcAft>
             </a:pPr>
             <a:r>
-              <a:rPr b="0" sz="1200">
+              <a:rPr sz="1200" b="0">
                 <a:solidFill>
                   <a:srgbClr val="60A5FA"/>
                 </a:solidFill>
@@ -4561,7 +4744,7 @@
               <a:t>•  </a:t>
             </a:r>
             <a:r>
-              <a:rPr b="1" sz="1200">
+              <a:rPr sz="1200" b="1">
                 <a:solidFill>
                   <a:srgbClr val="E2E8F0"/>
                 </a:solidFill>
@@ -4570,7 +4753,7 @@
               <a:t>Condición de Prueba: </a:t>
             </a:r>
             <a:r>
-              <a:rPr b="0" sz="1200">
+              <a:rPr sz="1200" b="0">
                 <a:solidFill>
                   <a:srgbClr val="94A3B8"/>
                 </a:solidFill>
@@ -4589,7 +4772,7 @@
               </a:spcAft>
             </a:pPr>
             <a:r>
-              <a:rPr b="0" sz="1200">
+              <a:rPr sz="1200" b="0">
                 <a:solidFill>
                   <a:srgbClr val="60A5FA"/>
                 </a:solidFill>
@@ -4598,7 +4781,7 @@
               <a:t>•  </a:t>
             </a:r>
             <a:r>
-              <a:rPr b="1" sz="1200">
+              <a:rPr sz="1200" b="1">
                 <a:solidFill>
                   <a:srgbClr val="E2E8F0"/>
                 </a:solidFill>
@@ -4607,7 +4790,7 @@
               <a:t>Resultado en Tablas: </a:t>
             </a:r>
             <a:r>
-              <a:rPr b="0" sz="1200">
+              <a:rPr sz="1200" b="0">
                 <a:solidFill>
                   <a:srgbClr val="94A3B8"/>
                 </a:solidFill>
@@ -4626,7 +4809,7 @@
               </a:spcAft>
             </a:pPr>
             <a:r>
-              <a:rPr b="0" sz="1200">
+              <a:rPr sz="1200" b="0">
                 <a:solidFill>
                   <a:srgbClr val="60A5FA"/>
                 </a:solidFill>
@@ -4635,7 +4818,7 @@
               <a:t>•  </a:t>
             </a:r>
             <a:r>
-              <a:rPr b="1" sz="1200">
+              <a:rPr sz="1200" b="1">
                 <a:solidFill>
                   <a:srgbClr val="E2E8F0"/>
                 </a:solidFill>
@@ -4644,7 +4827,7 @@
               <a:t>Resultado en Logs: </a:t>
             </a:r>
             <a:r>
-              <a:rPr b="0" sz="1200">
+              <a:rPr sz="1200" b="0">
                 <a:solidFill>
                   <a:srgbClr val="94A3B8"/>
                 </a:solidFill>
@@ -4663,7 +4846,7 @@
               </a:spcAft>
             </a:pPr>
             <a:r>
-              <a:rPr b="0" sz="1200">
+              <a:rPr sz="1200" b="0">
                 <a:solidFill>
                   <a:srgbClr val="60A5FA"/>
                 </a:solidFill>
@@ -4672,7 +4855,7 @@
               <a:t>•  </a:t>
             </a:r>
             <a:r>
-              <a:rPr b="1" sz="1200">
+              <a:rPr sz="1200" b="1">
                 <a:solidFill>
                   <a:srgbClr val="E2E8F0"/>
                 </a:solidFill>
@@ -4681,7 +4864,7 @@
               <a:t>Conclusión Crítica: </a:t>
             </a:r>
             <a:r>
-              <a:rPr b="0" sz="1200">
+              <a:rPr sz="1200" b="0">
                 <a:solidFill>
                   <a:srgbClr val="94A3B8"/>
                 </a:solidFill>
@@ -4700,7 +4883,7 @@
               </a:spcAft>
             </a:pPr>
             <a:r>
-              <a:rPr b="0" sz="1200">
+              <a:rPr sz="1200" b="0">
                 <a:solidFill>
                   <a:srgbClr val="60A5FA"/>
                 </a:solidFill>
@@ -4709,7 +4892,7 @@
               <a:t>•  </a:t>
             </a:r>
             <a:r>
-              <a:rPr b="1" sz="1200">
+              <a:rPr sz="1200" b="1">
                 <a:solidFill>
                   <a:srgbClr val="E2E8F0"/>
                 </a:solidFill>
@@ -4718,7 +4901,7 @@
               <a:t>Principio Rector: </a:t>
             </a:r>
             <a:r>
-              <a:rPr b="0" sz="1200">
+              <a:rPr sz="1200" b="0">
                 <a:solidFill>
                   <a:srgbClr val="94A3B8"/>
                 </a:solidFill>
@@ -4762,7 +4945,7 @@
 </file>
 
 <file path=ppt/slides/slide12.xml><?xml version="1.0" encoding="utf-8"?>
-<p:sld xmlns:a="http://schemas.openxmlformats.org/drawingml/2006/main" xmlns:p="http://schemas.openxmlformats.org/presentationml/2006/main" xmlns:r="http://schemas.openxmlformats.org/officeDocument/2006/relationships">
+<p:sld xmlns:a="http://schemas.openxmlformats.org/drawingml/2006/main" xmlns:r="http://schemas.openxmlformats.org/officeDocument/2006/relationships" xmlns:p="http://schemas.openxmlformats.org/presentationml/2006/main">
   <p:cSld>
     <p:spTree>
       <p:nvGrpSpPr>
@@ -4770,7 +4953,14 @@
         <p:cNvGrpSpPr/>
         <p:nvPr/>
       </p:nvGrpSpPr>
-      <p:grpSpPr/>
+      <p:grpSpPr>
+        <a:xfrm>
+          <a:off x="0" y="0"/>
+          <a:ext cx="0" cy="0"/>
+          <a:chOff x="0" y="0"/>
+          <a:chExt cx="0" cy="0"/>
+        </a:xfrm>
+      </p:grpSpPr>
       <p:sp>
         <p:nvSpPr>
           <p:cNvPr id="2" name="Rectangle 1"/>
@@ -4811,6 +5001,7 @@
           <a:lstStyle/>
           <a:p>
             <a:pPr algn="ctr"/>
+            <a:endParaRPr/>
           </a:p>
         </p:txBody>
       </p:sp>
@@ -4929,6 +5120,7 @@
           <a:lstStyle/>
           <a:p>
             <a:pPr algn="ctr"/>
+            <a:endParaRPr/>
           </a:p>
         </p:txBody>
       </p:sp>
@@ -4999,7 +5191,7 @@
               </a:spcAft>
             </a:pPr>
             <a:r>
-              <a:rPr b="0" sz="1200">
+              <a:rPr sz="1200" b="0">
                 <a:solidFill>
                   <a:srgbClr val="60A5FA"/>
                 </a:solidFill>
@@ -5008,7 +5200,7 @@
               <a:t>•  </a:t>
             </a:r>
             <a:r>
-              <a:rPr b="1" sz="1200">
+              <a:rPr sz="1200" b="1">
                 <a:solidFill>
                   <a:srgbClr val="E2E8F0"/>
                 </a:solidFill>
@@ -5017,7 +5209,7 @@
               <a:t>Propósito: </a:t>
             </a:r>
             <a:r>
-              <a:rPr b="0" sz="1200">
+              <a:rPr sz="1200" b="0">
                 <a:solidFill>
                   <a:srgbClr val="94A3B8"/>
                 </a:solidFill>
@@ -5036,7 +5228,7 @@
               </a:spcAft>
             </a:pPr>
             <a:r>
-              <a:rPr b="0" sz="1200">
+              <a:rPr sz="1200" b="0">
                 <a:solidFill>
                   <a:srgbClr val="60A5FA"/>
                 </a:solidFill>
@@ -5045,7 +5237,7 @@
               <a:t>•  </a:t>
             </a:r>
             <a:r>
-              <a:rPr b="1" sz="1200">
+              <a:rPr sz="1200" b="1">
                 <a:solidFill>
                   <a:srgbClr val="E2E8F0"/>
                 </a:solidFill>
@@ -5054,7 +5246,7 @@
               <a:t>Tiempo de Ejecución: </a:t>
             </a:r>
             <a:r>
-              <a:rPr b="0" sz="1200">
+              <a:rPr sz="1200" b="0">
                 <a:solidFill>
                   <a:srgbClr val="94A3B8"/>
                 </a:solidFill>
@@ -5073,7 +5265,7 @@
               </a:spcAft>
             </a:pPr>
             <a:r>
-              <a:rPr b="0" sz="1200">
+              <a:rPr sz="1200" b="0">
                 <a:solidFill>
                   <a:srgbClr val="60A5FA"/>
                 </a:solidFill>
@@ -5082,7 +5274,7 @@
               <a:t>•  </a:t>
             </a:r>
             <a:r>
-              <a:rPr b="1" sz="1200">
+              <a:rPr sz="1200" b="1">
                 <a:solidFill>
                   <a:srgbClr val="E2E8F0"/>
                 </a:solidFill>
@@ -5091,7 +5283,7 @@
               <a:t>Buffers (Hit vs Read): </a:t>
             </a:r>
             <a:r>
-              <a:rPr b="0" sz="1200">
+              <a:rPr sz="1200" b="0">
                 <a:solidFill>
                   <a:srgbClr val="94A3B8"/>
                 </a:solidFill>
@@ -5110,7 +5302,7 @@
               </a:spcAft>
             </a:pPr>
             <a:r>
-              <a:rPr b="0" sz="1200">
+              <a:rPr sz="1200" b="0">
                 <a:solidFill>
                   <a:srgbClr val="60A5FA"/>
                 </a:solidFill>
@@ -5119,7 +5311,7 @@
               <a:t>•  </a:t>
             </a:r>
             <a:r>
-              <a:rPr b="1" sz="1200">
+              <a:rPr sz="1200" b="1">
                 <a:solidFill>
                   <a:srgbClr val="E2E8F0"/>
                 </a:solidFill>
@@ -5128,7 +5320,7 @@
               <a:t>Sintaxis Utilizada: </a:t>
             </a:r>
             <a:r>
-              <a:rPr b="0" sz="1200">
+              <a:rPr sz="1200" b="0">
                 <a:solidFill>
                   <a:srgbClr val="94A3B8"/>
                 </a:solidFill>
@@ -5182,6 +5374,7 @@
           <a:lstStyle/>
           <a:p>
             <a:pPr algn="ctr"/>
+            <a:endParaRPr/>
           </a:p>
         </p:txBody>
       </p:sp>
@@ -5252,7 +5445,7 @@
               </a:spcAft>
             </a:pPr>
             <a:r>
-              <a:rPr b="0" sz="1200">
+              <a:rPr sz="1200" b="0">
                 <a:solidFill>
                   <a:srgbClr val="60A5FA"/>
                 </a:solidFill>
@@ -5261,7 +5454,7 @@
               <a:t>•  </a:t>
             </a:r>
             <a:r>
-              <a:rPr b="1" sz="1200">
+              <a:rPr sz="1200" b="1">
                 <a:solidFill>
                   <a:srgbClr val="E2E8F0"/>
                 </a:solidFill>
@@ -5270,7 +5463,7 @@
               <a:t>Sequential Scan (Seq Scan): </a:t>
             </a:r>
             <a:r>
-              <a:rPr b="0" sz="1200">
+              <a:rPr sz="1200" b="0">
                 <a:solidFill>
                   <a:srgbClr val="94A3B8"/>
                 </a:solidFill>
@@ -5289,7 +5482,7 @@
               </a:spcAft>
             </a:pPr>
             <a:r>
-              <a:rPr b="0" sz="1200">
+              <a:rPr sz="1200" b="0">
                 <a:solidFill>
                   <a:srgbClr val="60A5FA"/>
                 </a:solidFill>
@@ -5298,7 +5491,7 @@
               <a:t>•  </a:t>
             </a:r>
             <a:r>
-              <a:rPr b="1" sz="1200">
+              <a:rPr sz="1200" b="1">
                 <a:solidFill>
                   <a:srgbClr val="E2E8F0"/>
                 </a:solidFill>
@@ -5307,7 +5500,7 @@
               <a:t>Index Scan: </a:t>
             </a:r>
             <a:r>
-              <a:rPr b="0" sz="1200">
+              <a:rPr sz="1200" b="0">
                 <a:solidFill>
                   <a:srgbClr val="94A3B8"/>
                 </a:solidFill>
@@ -5326,7 +5519,7 @@
               </a:spcAft>
             </a:pPr>
             <a:r>
-              <a:rPr b="0" sz="1200">
+              <a:rPr sz="1200" b="0">
                 <a:solidFill>
                   <a:srgbClr val="60A5FA"/>
                 </a:solidFill>
@@ -5335,7 +5528,7 @@
               <a:t>•  </a:t>
             </a:r>
             <a:r>
-              <a:rPr b="1" sz="1200">
+              <a:rPr sz="1200" b="1">
                 <a:solidFill>
                   <a:srgbClr val="E2E8F0"/>
                 </a:solidFill>
@@ -5344,7 +5537,7 @@
               <a:t>Bitmap Heap Scan: </a:t>
             </a:r>
             <a:r>
-              <a:rPr b="0" sz="1200">
+              <a:rPr sz="1200" b="0">
                 <a:solidFill>
                   <a:srgbClr val="94A3B8"/>
                 </a:solidFill>
@@ -5363,7 +5556,7 @@
               </a:spcAft>
             </a:pPr>
             <a:r>
-              <a:rPr b="0" sz="1200">
+              <a:rPr sz="1200" b="0">
                 <a:solidFill>
                   <a:srgbClr val="60A5FA"/>
                 </a:solidFill>
@@ -5372,7 +5565,7 @@
               <a:t>•  </a:t>
             </a:r>
             <a:r>
-              <a:rPr b="1" sz="1200">
+              <a:rPr sz="1200" b="1">
                 <a:solidFill>
                   <a:srgbClr val="E2E8F0"/>
                 </a:solidFill>
@@ -5381,7 +5574,7 @@
               <a:t>Nodo Sort: </a:t>
             </a:r>
             <a:r>
-              <a:rPr b="0" sz="1200">
+              <a:rPr sz="1200" b="0">
                 <a:solidFill>
                   <a:srgbClr val="94A3B8"/>
                 </a:solidFill>
@@ -5401,7 +5594,7 @@
 </file>
 
 <file path=ppt/slides/slide13.xml><?xml version="1.0" encoding="utf-8"?>
-<p:sld xmlns:a="http://schemas.openxmlformats.org/drawingml/2006/main" xmlns:p="http://schemas.openxmlformats.org/presentationml/2006/main" xmlns:r="http://schemas.openxmlformats.org/officeDocument/2006/relationships">
+<p:sld xmlns:a="http://schemas.openxmlformats.org/drawingml/2006/main" xmlns:r="http://schemas.openxmlformats.org/officeDocument/2006/relationships" xmlns:p="http://schemas.openxmlformats.org/presentationml/2006/main">
   <p:cSld>
     <p:spTree>
       <p:nvGrpSpPr>
@@ -5409,7 +5602,14 @@
         <p:cNvGrpSpPr/>
         <p:nvPr/>
       </p:nvGrpSpPr>
-      <p:grpSpPr/>
+      <p:grpSpPr>
+        <a:xfrm>
+          <a:off x="0" y="0"/>
+          <a:ext cx="0" cy="0"/>
+          <a:chOff x="0" y="0"/>
+          <a:chExt cx="0" cy="0"/>
+        </a:xfrm>
+      </p:grpSpPr>
       <p:sp>
         <p:nvSpPr>
           <p:cNvPr id="2" name="Rectangle 1"/>
@@ -5450,6 +5650,7 @@
           <a:lstStyle/>
           <a:p>
             <a:pPr algn="ctr"/>
+            <a:endParaRPr/>
           </a:p>
         </p:txBody>
       </p:sp>
@@ -5568,6 +5769,7 @@
           <a:lstStyle/>
           <a:p>
             <a:pPr algn="ctr"/>
+            <a:endParaRPr/>
           </a:p>
         </p:txBody>
       </p:sp>
@@ -5638,7 +5840,7 @@
               </a:spcAft>
             </a:pPr>
             <a:r>
-              <a:rPr b="0" sz="1200">
+              <a:rPr sz="1200" b="0">
                 <a:solidFill>
                   <a:srgbClr val="60A5FA"/>
                 </a:solidFill>
@@ -5647,7 +5849,7 @@
               <a:t>•  </a:t>
             </a:r>
             <a:r>
-              <a:rPr b="1" sz="1200">
+              <a:rPr sz="1200" b="1">
                 <a:solidFill>
                   <a:srgbClr val="E2E8F0"/>
                 </a:solidFill>
@@ -5656,7 +5858,7 @@
               <a:t>B-Tree (Árbol Balanceado): </a:t>
             </a:r>
             <a:r>
-              <a:rPr b="0" sz="1200">
+              <a:rPr sz="1200" b="0">
                 <a:solidFill>
                   <a:srgbClr val="94A3B8"/>
                 </a:solidFill>
@@ -5675,7 +5877,7 @@
               </a:spcAft>
             </a:pPr>
             <a:r>
-              <a:rPr b="0" sz="1200">
+              <a:rPr sz="1200" b="0">
                 <a:solidFill>
                   <a:srgbClr val="60A5FA"/>
                 </a:solidFill>
@@ -5684,7 +5886,7 @@
               <a:t>•  </a:t>
             </a:r>
             <a:r>
-              <a:rPr b="1" sz="1200">
+              <a:rPr sz="1200" b="1">
                 <a:solidFill>
                   <a:srgbClr val="E2E8F0"/>
                 </a:solidFill>
@@ -5693,7 +5895,7 @@
               <a:t>¿Cuándo usarlo?: </a:t>
             </a:r>
             <a:r>
-              <a:rPr b="0" sz="1200">
+              <a:rPr sz="1200" b="0">
                 <a:solidFill>
                   <a:srgbClr val="94A3B8"/>
                 </a:solidFill>
@@ -5712,7 +5914,7 @@
               </a:spcAft>
             </a:pPr>
             <a:r>
-              <a:rPr b="0" sz="1200">
+              <a:rPr sz="1200" b="0">
                 <a:solidFill>
                   <a:srgbClr val="60A5FA"/>
                 </a:solidFill>
@@ -5721,7 +5923,7 @@
               <a:t>•  </a:t>
             </a:r>
             <a:r>
-              <a:rPr b="1" sz="1200">
+              <a:rPr sz="1200" b="1">
                 <a:solidFill>
                   <a:srgbClr val="E2E8F0"/>
                 </a:solidFill>
@@ -5730,7 +5932,7 @@
               <a:t>Índice Compuesto: </a:t>
             </a:r>
             <a:r>
-              <a:rPr b="0" sz="1200">
+              <a:rPr sz="1200" b="0">
                 <a:solidFill>
                   <a:srgbClr val="94A3B8"/>
                 </a:solidFill>
@@ -5749,7 +5951,7 @@
               </a:spcAft>
             </a:pPr>
             <a:r>
-              <a:rPr b="0" sz="1200">
+              <a:rPr sz="1200" b="0">
                 <a:solidFill>
                   <a:srgbClr val="60A5FA"/>
                 </a:solidFill>
@@ -5758,7 +5960,7 @@
               <a:t>•  </a:t>
             </a:r>
             <a:r>
-              <a:rPr b="1" sz="1200">
+              <a:rPr sz="1200" b="1">
                 <a:solidFill>
                   <a:srgbClr val="E2E8F0"/>
                 </a:solidFill>
@@ -5767,7 +5969,7 @@
               <a:t>¿Cuándo usarlo?: </a:t>
             </a:r>
             <a:r>
-              <a:rPr b="0" sz="1200">
+              <a:rPr sz="1200" b="0">
                 <a:solidFill>
                   <a:srgbClr val="94A3B8"/>
                 </a:solidFill>
@@ -5821,6 +6023,7 @@
           <a:lstStyle/>
           <a:p>
             <a:pPr algn="ctr"/>
+            <a:endParaRPr/>
           </a:p>
         </p:txBody>
       </p:sp>
@@ -5891,7 +6094,7 @@
               </a:spcAft>
             </a:pPr>
             <a:r>
-              <a:rPr b="0" sz="1200">
+              <a:rPr sz="1200" b="0">
                 <a:solidFill>
                   <a:srgbClr val="60A5FA"/>
                 </a:solidFill>
@@ -5900,7 +6103,7 @@
               <a:t>•  </a:t>
             </a:r>
             <a:r>
-              <a:rPr b="1" sz="1200">
+              <a:rPr sz="1200" b="1">
                 <a:solidFill>
                   <a:srgbClr val="E2E8F0"/>
                 </a:solidFill>
@@ -5909,7 +6112,7 @@
               <a:t>Hash: </a:t>
             </a:r>
             <a:r>
-              <a:rPr b="0" sz="1200">
+              <a:rPr sz="1200" b="0">
                 <a:solidFill>
                   <a:srgbClr val="94A3B8"/>
                 </a:solidFill>
@@ -5928,7 +6131,7 @@
               </a:spcAft>
             </a:pPr>
             <a:r>
-              <a:rPr b="0" sz="1200">
+              <a:rPr sz="1200" b="0">
                 <a:solidFill>
                   <a:srgbClr val="60A5FA"/>
                 </a:solidFill>
@@ -5937,7 +6140,7 @@
               <a:t>•  </a:t>
             </a:r>
             <a:r>
-              <a:rPr b="1" sz="1200">
+              <a:rPr sz="1200" b="1">
                 <a:solidFill>
                   <a:srgbClr val="E2E8F0"/>
                 </a:solidFill>
@@ -5946,7 +6149,7 @@
               <a:t>¿Cuándo usarlo?: </a:t>
             </a:r>
             <a:r>
-              <a:rPr b="0" sz="1200">
+              <a:rPr sz="1200" b="0">
                 <a:solidFill>
                   <a:srgbClr val="94A3B8"/>
                 </a:solidFill>
@@ -5965,7 +6168,7 @@
               </a:spcAft>
             </a:pPr>
             <a:r>
-              <a:rPr b="0" sz="1200">
+              <a:rPr sz="1200" b="0">
                 <a:solidFill>
                   <a:srgbClr val="60A5FA"/>
                 </a:solidFill>
@@ -5974,7 +6177,7 @@
               <a:t>•  </a:t>
             </a:r>
             <a:r>
-              <a:rPr b="1" sz="1200">
+              <a:rPr sz="1200" b="1">
                 <a:solidFill>
                   <a:srgbClr val="E2E8F0"/>
                 </a:solidFill>
@@ -5983,7 +6186,7 @@
               <a:t>Bitmap Index Scan: </a:t>
             </a:r>
             <a:r>
-              <a:rPr b="0" sz="1200">
+              <a:rPr sz="1200" b="0">
                 <a:solidFill>
                   <a:srgbClr val="94A3B8"/>
                 </a:solidFill>
@@ -6002,7 +6205,7 @@
               </a:spcAft>
             </a:pPr>
             <a:r>
-              <a:rPr b="0" sz="1200">
+              <a:rPr sz="1200" b="0">
                 <a:solidFill>
                   <a:srgbClr val="60A5FA"/>
                 </a:solidFill>
@@ -6011,7 +6214,7 @@
               <a:t>•  </a:t>
             </a:r>
             <a:r>
-              <a:rPr b="1" sz="1200">
+              <a:rPr sz="1200" b="1">
                 <a:solidFill>
                   <a:srgbClr val="E2E8F0"/>
                 </a:solidFill>
@@ -6020,7 +6223,7 @@
               <a:t>¿Cuándo aparece?: </a:t>
             </a:r>
             <a:r>
-              <a:rPr b="0" sz="1200">
+              <a:rPr sz="1200" b="0">
                 <a:solidFill>
                   <a:srgbClr val="94A3B8"/>
                 </a:solidFill>
@@ -6040,7 +6243,7 @@
 </file>
 
 <file path=ppt/slides/slide14.xml><?xml version="1.0" encoding="utf-8"?>
-<p:sld xmlns:a="http://schemas.openxmlformats.org/drawingml/2006/main" xmlns:p="http://schemas.openxmlformats.org/presentationml/2006/main" xmlns:r="http://schemas.openxmlformats.org/officeDocument/2006/relationships">
+<p:sld xmlns:a="http://schemas.openxmlformats.org/drawingml/2006/main" xmlns:r="http://schemas.openxmlformats.org/officeDocument/2006/relationships" xmlns:p="http://schemas.openxmlformats.org/presentationml/2006/main">
   <p:cSld>
     <p:spTree>
       <p:nvGrpSpPr>
@@ -6048,7 +6251,14 @@
         <p:cNvGrpSpPr/>
         <p:nvPr/>
       </p:nvGrpSpPr>
-      <p:grpSpPr/>
+      <p:grpSpPr>
+        <a:xfrm>
+          <a:off x="0" y="0"/>
+          <a:ext cx="0" cy="0"/>
+          <a:chOff x="0" y="0"/>
+          <a:chExt cx="0" cy="0"/>
+        </a:xfrm>
+      </p:grpSpPr>
       <p:sp>
         <p:nvSpPr>
           <p:cNvPr id="2" name="Rectangle 1"/>
@@ -6089,6 +6299,7 @@
           <a:lstStyle/>
           <a:p>
             <a:pPr algn="ctr"/>
+            <a:endParaRPr/>
           </a:p>
         </p:txBody>
       </p:sp>
@@ -6207,6 +6418,7 @@
           <a:lstStyle/>
           <a:p>
             <a:pPr algn="ctr"/>
+            <a:endParaRPr/>
           </a:p>
         </p:txBody>
       </p:sp>
@@ -6277,7 +6489,7 @@
               </a:spcAft>
             </a:pPr>
             <a:r>
-              <a:rPr b="0" sz="1200">
+              <a:rPr sz="1200" b="0">
                 <a:solidFill>
                   <a:srgbClr val="60A5FA"/>
                 </a:solidFill>
@@ -6286,7 +6498,7 @@
               <a:t>•  </a:t>
             </a:r>
             <a:r>
-              <a:rPr b="1" sz="1200">
+              <a:rPr sz="1200" b="1">
                 <a:solidFill>
                   <a:srgbClr val="E2E8F0"/>
                 </a:solidFill>
@@ -6295,7 +6507,7 @@
               <a:t>Problema: </a:t>
             </a:r>
             <a:r>
-              <a:rPr b="0" sz="1200">
+              <a:rPr sz="1200" b="0">
                 <a:solidFill>
                   <a:srgbClr val="94A3B8"/>
                 </a:solidFill>
@@ -6314,7 +6526,7 @@
               </a:spcAft>
             </a:pPr>
             <a:r>
-              <a:rPr b="0" sz="1200">
+              <a:rPr sz="1200" b="0">
                 <a:solidFill>
                   <a:srgbClr val="60A5FA"/>
                 </a:solidFill>
@@ -6323,7 +6535,7 @@
               <a:t>•  </a:t>
             </a:r>
             <a:r>
-              <a:rPr b="1" sz="1200">
+              <a:rPr sz="1200" b="1">
                 <a:solidFill>
                   <a:srgbClr val="E2E8F0"/>
                 </a:solidFill>
@@ -6332,7 +6544,7 @@
               <a:t>Solución Aplicada: </a:t>
             </a:r>
             <a:r>
-              <a:rPr b="0" sz="1200">
+              <a:rPr sz="1200" b="0">
                 <a:solidFill>
                   <a:srgbClr val="94A3B8"/>
                 </a:solidFill>
@@ -6351,7 +6563,7 @@
               </a:spcAft>
             </a:pPr>
             <a:r>
-              <a:rPr b="0" sz="1200">
+              <a:rPr sz="1200" b="0">
                 <a:solidFill>
                   <a:srgbClr val="60A5FA"/>
                 </a:solidFill>
@@ -6360,7 +6572,7 @@
               <a:t>•  </a:t>
             </a:r>
             <a:r>
-              <a:rPr b="1" sz="1200">
+              <a:rPr sz="1200" b="1">
                 <a:solidFill>
                   <a:srgbClr val="E2E8F0"/>
                 </a:solidFill>
@@ -6369,7 +6581,7 @@
               <a:t>Qué Observar en EXPLAIN: </a:t>
             </a:r>
             <a:r>
-              <a:rPr b="0" sz="1200">
+              <a:rPr sz="1200" b="0">
                 <a:solidFill>
                   <a:srgbClr val="94A3B8"/>
                 </a:solidFill>
@@ -6388,7 +6600,7 @@
               </a:spcAft>
             </a:pPr>
             <a:r>
-              <a:rPr b="0" sz="1200">
+              <a:rPr sz="1200" b="0">
                 <a:solidFill>
                   <a:srgbClr val="60A5FA"/>
                 </a:solidFill>
@@ -6397,7 +6609,7 @@
               <a:t>•  </a:t>
             </a:r>
             <a:r>
-              <a:rPr b="1" sz="1200">
+              <a:rPr sz="1200" b="1">
                 <a:solidFill>
                   <a:srgbClr val="E2E8F0"/>
                 </a:solidFill>
@@ -6406,7 +6618,7 @@
               <a:t>Demostración: </a:t>
             </a:r>
             <a:r>
-              <a:rPr b="0" sz="1200">
+              <a:rPr sz="1200" b="0">
                 <a:solidFill>
                   <a:srgbClr val="94A3B8"/>
                 </a:solidFill>
@@ -6460,6 +6672,7 @@
           <a:lstStyle/>
           <a:p>
             <a:pPr algn="ctr"/>
+            <a:endParaRPr/>
           </a:p>
         </p:txBody>
       </p:sp>
@@ -6530,7 +6743,7 @@
               </a:spcAft>
             </a:pPr>
             <a:r>
-              <a:rPr b="0" sz="1200">
+              <a:rPr sz="1200" b="0">
                 <a:solidFill>
                   <a:srgbClr val="60A5FA"/>
                 </a:solidFill>
@@ -6539,7 +6752,7 @@
               <a:t>•  </a:t>
             </a:r>
             <a:r>
-              <a:rPr b="1" sz="1200">
+              <a:rPr sz="1200" b="1">
                 <a:solidFill>
                   <a:srgbClr val="E2E8F0"/>
                 </a:solidFill>
@@ -6548,7 +6761,7 @@
               <a:t>Problema: </a:t>
             </a:r>
             <a:r>
-              <a:rPr b="0" sz="1200">
+              <a:rPr sz="1200" b="0">
                 <a:solidFill>
                   <a:srgbClr val="94A3B8"/>
                 </a:solidFill>
@@ -6567,7 +6780,7 @@
               </a:spcAft>
             </a:pPr>
             <a:r>
-              <a:rPr b="0" sz="1200">
+              <a:rPr sz="1200" b="0">
                 <a:solidFill>
                   <a:srgbClr val="60A5FA"/>
                 </a:solidFill>
@@ -6576,7 +6789,7 @@
               <a:t>•  </a:t>
             </a:r>
             <a:r>
-              <a:rPr b="1" sz="1200">
+              <a:rPr sz="1200" b="1">
                 <a:solidFill>
                   <a:srgbClr val="E2E8F0"/>
                 </a:solidFill>
@@ -6585,7 +6798,7 @@
               <a:t>Solución Aplicada: </a:t>
             </a:r>
             <a:r>
-              <a:rPr b="0" sz="1200">
+              <a:rPr sz="1200" b="0">
                 <a:solidFill>
                   <a:srgbClr val="94A3B8"/>
                 </a:solidFill>
@@ -6604,7 +6817,7 @@
               </a:spcAft>
             </a:pPr>
             <a:r>
-              <a:rPr b="0" sz="1200">
+              <a:rPr sz="1200" b="0">
                 <a:solidFill>
                   <a:srgbClr val="60A5FA"/>
                 </a:solidFill>
@@ -6613,7 +6826,7 @@
               <a:t>•  </a:t>
             </a:r>
             <a:r>
-              <a:rPr b="1" sz="1200">
+              <a:rPr sz="1200" b="1">
                 <a:solidFill>
                   <a:srgbClr val="E2E8F0"/>
                 </a:solidFill>
@@ -6622,7 +6835,7 @@
               <a:t>Qué Observar en EXPLAIN: </a:t>
             </a:r>
             <a:r>
-              <a:rPr b="0" sz="1200">
+              <a:rPr sz="1200" b="0">
                 <a:solidFill>
                   <a:srgbClr val="94A3B8"/>
                 </a:solidFill>
@@ -6641,7 +6854,7 @@
               </a:spcAft>
             </a:pPr>
             <a:r>
-              <a:rPr b="0" sz="1200">
+              <a:rPr sz="1200" b="0">
                 <a:solidFill>
                   <a:srgbClr val="60A5FA"/>
                 </a:solidFill>
@@ -6650,7 +6863,7 @@
               <a:t>•  </a:t>
             </a:r>
             <a:r>
-              <a:rPr b="1" sz="1200">
+              <a:rPr sz="1200" b="1">
                 <a:solidFill>
                   <a:srgbClr val="E2E8F0"/>
                 </a:solidFill>
@@ -6659,7 +6872,7 @@
               <a:t>Demostración: </a:t>
             </a:r>
             <a:r>
-              <a:rPr b="0" sz="1200">
+              <a:rPr sz="1200" b="0">
                 <a:solidFill>
                   <a:srgbClr val="94A3B8"/>
                 </a:solidFill>
@@ -6679,7 +6892,7 @@
 </file>
 
 <file path=ppt/slides/slide15.xml><?xml version="1.0" encoding="utf-8"?>
-<p:sld xmlns:a="http://schemas.openxmlformats.org/drawingml/2006/main" xmlns:p="http://schemas.openxmlformats.org/presentationml/2006/main" xmlns:r="http://schemas.openxmlformats.org/officeDocument/2006/relationships">
+<p:sld xmlns:a="http://schemas.openxmlformats.org/drawingml/2006/main" xmlns:r="http://schemas.openxmlformats.org/officeDocument/2006/relationships" xmlns:p="http://schemas.openxmlformats.org/presentationml/2006/main">
   <p:cSld>
     <p:spTree>
       <p:nvGrpSpPr>
@@ -6687,7 +6900,14 @@
         <p:cNvGrpSpPr/>
         <p:nvPr/>
       </p:nvGrpSpPr>
-      <p:grpSpPr/>
+      <p:grpSpPr>
+        <a:xfrm>
+          <a:off x="0" y="0"/>
+          <a:ext cx="0" cy="0"/>
+          <a:chOff x="0" y="0"/>
+          <a:chExt cx="0" cy="0"/>
+        </a:xfrm>
+      </p:grpSpPr>
       <p:sp>
         <p:nvSpPr>
           <p:cNvPr id="2" name="Rectangle 1"/>
@@ -6728,6 +6948,7 @@
           <a:lstStyle/>
           <a:p>
             <a:pPr algn="ctr"/>
+            <a:endParaRPr/>
           </a:p>
         </p:txBody>
       </p:sp>
@@ -6846,6 +7067,7 @@
           <a:lstStyle/>
           <a:p>
             <a:pPr algn="ctr"/>
+            <a:endParaRPr/>
           </a:p>
         </p:txBody>
       </p:sp>
@@ -6916,7 +7138,7 @@
               </a:spcAft>
             </a:pPr>
             <a:r>
-              <a:rPr b="0" sz="1200">
+              <a:rPr sz="1200" b="0">
                 <a:solidFill>
                   <a:srgbClr val="60A5FA"/>
                 </a:solidFill>
@@ -6925,7 +7147,7 @@
               <a:t>•  </a:t>
             </a:r>
             <a:r>
-              <a:rPr b="1" sz="1200">
+              <a:rPr sz="1200" b="1">
                 <a:solidFill>
                   <a:srgbClr val="E2E8F0"/>
                 </a:solidFill>
@@ -6934,7 +7156,7 @@
               <a:t>Problema: </a:t>
             </a:r>
             <a:r>
-              <a:rPr b="0" sz="1200">
+              <a:rPr sz="1200" b="0">
                 <a:solidFill>
                   <a:srgbClr val="94A3B8"/>
                 </a:solidFill>
@@ -6953,7 +7175,7 @@
               </a:spcAft>
             </a:pPr>
             <a:r>
-              <a:rPr b="0" sz="1200">
+              <a:rPr sz="1200" b="0">
                 <a:solidFill>
                   <a:srgbClr val="60A5FA"/>
                 </a:solidFill>
@@ -6962,7 +7184,7 @@
               <a:t>•  </a:t>
             </a:r>
             <a:r>
-              <a:rPr b="1" sz="1200">
+              <a:rPr sz="1200" b="1">
                 <a:solidFill>
                   <a:srgbClr val="E2E8F0"/>
                 </a:solidFill>
@@ -6971,7 +7193,7 @@
               <a:t>Solución Aplicada: </a:t>
             </a:r>
             <a:r>
-              <a:rPr b="0" sz="1200">
+              <a:rPr sz="1200" b="0">
                 <a:solidFill>
                   <a:srgbClr val="94A3B8"/>
                 </a:solidFill>
@@ -6990,7 +7212,7 @@
               </a:spcAft>
             </a:pPr>
             <a:r>
-              <a:rPr b="0" sz="1200">
+              <a:rPr sz="1200" b="0">
                 <a:solidFill>
                   <a:srgbClr val="60A5FA"/>
                 </a:solidFill>
@@ -6999,7 +7221,7 @@
               <a:t>•  </a:t>
             </a:r>
             <a:r>
-              <a:rPr b="1" sz="1200">
+              <a:rPr sz="1200" b="1">
                 <a:solidFill>
                   <a:srgbClr val="E2E8F0"/>
                 </a:solidFill>
@@ -7008,7 +7230,7 @@
               <a:t>Qué Observar en EXPLAIN: </a:t>
             </a:r>
             <a:r>
-              <a:rPr b="0" sz="1200">
+              <a:rPr sz="1200" b="0">
                 <a:solidFill>
                   <a:srgbClr val="94A3B8"/>
                 </a:solidFill>
@@ -7027,7 +7249,7 @@
               </a:spcAft>
             </a:pPr>
             <a:r>
-              <a:rPr b="0" sz="1200">
+              <a:rPr sz="1200" b="0">
                 <a:solidFill>
                   <a:srgbClr val="60A5FA"/>
                 </a:solidFill>
@@ -7036,7 +7258,7 @@
               <a:t>•  </a:t>
             </a:r>
             <a:r>
-              <a:rPr b="1" sz="1200">
+              <a:rPr sz="1200" b="1">
                 <a:solidFill>
                   <a:srgbClr val="E2E8F0"/>
                 </a:solidFill>
@@ -7045,7 +7267,7 @@
               <a:t>Demostración: </a:t>
             </a:r>
             <a:r>
-              <a:rPr b="0" sz="1200">
+              <a:rPr sz="1200" b="0">
                 <a:solidFill>
                   <a:srgbClr val="94A3B8"/>
                 </a:solidFill>
@@ -7099,6 +7321,7 @@
           <a:lstStyle/>
           <a:p>
             <a:pPr algn="ctr"/>
+            <a:endParaRPr/>
           </a:p>
         </p:txBody>
       </p:sp>
@@ -7169,7 +7392,7 @@
               </a:spcAft>
             </a:pPr>
             <a:r>
-              <a:rPr b="0" sz="1200">
+              <a:rPr sz="1200" b="0">
                 <a:solidFill>
                   <a:srgbClr val="60A5FA"/>
                 </a:solidFill>
@@ -7178,7 +7401,7 @@
               <a:t>•  </a:t>
             </a:r>
             <a:r>
-              <a:rPr b="1" sz="1200">
+              <a:rPr sz="1200" b="1">
                 <a:solidFill>
                   <a:srgbClr val="E2E8F0"/>
                 </a:solidFill>
@@ -7187,7 +7410,7 @@
               <a:t>Problema: </a:t>
             </a:r>
             <a:r>
-              <a:rPr b="0" sz="1200">
+              <a:rPr sz="1200" b="0">
                 <a:solidFill>
                   <a:srgbClr val="94A3B8"/>
                 </a:solidFill>
@@ -7206,7 +7429,7 @@
               </a:spcAft>
             </a:pPr>
             <a:r>
-              <a:rPr b="0" sz="1200">
+              <a:rPr sz="1200" b="0">
                 <a:solidFill>
                   <a:srgbClr val="60A5FA"/>
                 </a:solidFill>
@@ -7215,7 +7438,7 @@
               <a:t>•  </a:t>
             </a:r>
             <a:r>
-              <a:rPr b="1" sz="1200">
+              <a:rPr sz="1200" b="1">
                 <a:solidFill>
                   <a:srgbClr val="E2E8F0"/>
                 </a:solidFill>
@@ -7224,7 +7447,7 @@
               <a:t>Solución Observada: </a:t>
             </a:r>
             <a:r>
-              <a:rPr b="0" sz="1200">
+              <a:rPr sz="1200" b="0">
                 <a:solidFill>
                   <a:srgbClr val="94A3B8"/>
                 </a:solidFill>
@@ -7243,7 +7466,7 @@
               </a:spcAft>
             </a:pPr>
             <a:r>
-              <a:rPr b="0" sz="1200">
+              <a:rPr sz="1200" b="0">
                 <a:solidFill>
                   <a:srgbClr val="60A5FA"/>
                 </a:solidFill>
@@ -7252,7 +7475,7 @@
               <a:t>•  </a:t>
             </a:r>
             <a:r>
-              <a:rPr b="1" sz="1200">
+              <a:rPr sz="1200" b="1">
                 <a:solidFill>
                   <a:srgbClr val="E2E8F0"/>
                 </a:solidFill>
@@ -7261,7 +7484,7 @@
               <a:t>Qué Observar en EXPLAIN: </a:t>
             </a:r>
             <a:r>
-              <a:rPr b="0" sz="1200">
+              <a:rPr sz="1200" b="0">
                 <a:solidFill>
                   <a:srgbClr val="94A3B8"/>
                 </a:solidFill>
@@ -7280,7 +7503,7 @@
               </a:spcAft>
             </a:pPr>
             <a:r>
-              <a:rPr b="0" sz="1200">
+              <a:rPr sz="1200" b="0">
                 <a:solidFill>
                   <a:srgbClr val="60A5FA"/>
                 </a:solidFill>
@@ -7289,7 +7512,7 @@
               <a:t>•  </a:t>
             </a:r>
             <a:r>
-              <a:rPr b="1" sz="1200">
+              <a:rPr sz="1200" b="1">
                 <a:solidFill>
                   <a:srgbClr val="E2E8F0"/>
                 </a:solidFill>
@@ -7298,7 +7521,7 @@
               <a:t>Demostración: </a:t>
             </a:r>
             <a:r>
-              <a:rPr b="0" sz="1200">
+              <a:rPr sz="1200" b="0">
                 <a:solidFill>
                   <a:srgbClr val="94A3B8"/>
                 </a:solidFill>
@@ -7318,7 +7541,7 @@
 </file>
 
 <file path=ppt/slides/slide16.xml><?xml version="1.0" encoding="utf-8"?>
-<p:sld xmlns:a="http://schemas.openxmlformats.org/drawingml/2006/main" xmlns:p="http://schemas.openxmlformats.org/presentationml/2006/main" xmlns:r="http://schemas.openxmlformats.org/officeDocument/2006/relationships">
+<p:sld xmlns:a="http://schemas.openxmlformats.org/drawingml/2006/main" xmlns:r="http://schemas.openxmlformats.org/officeDocument/2006/relationships" xmlns:p="http://schemas.openxmlformats.org/presentationml/2006/main">
   <p:cSld>
     <p:spTree>
       <p:nvGrpSpPr>
@@ -7326,7 +7549,14 @@
         <p:cNvGrpSpPr/>
         <p:nvPr/>
       </p:nvGrpSpPr>
-      <p:grpSpPr/>
+      <p:grpSpPr>
+        <a:xfrm>
+          <a:off x="0" y="0"/>
+          <a:ext cx="0" cy="0"/>
+          <a:chOff x="0" y="0"/>
+          <a:chExt cx="0" cy="0"/>
+        </a:xfrm>
+      </p:grpSpPr>
       <p:sp>
         <p:nvSpPr>
           <p:cNvPr id="2" name="Rectangle 1"/>
@@ -7367,6 +7597,7 @@
           <a:lstStyle/>
           <a:p>
             <a:pPr algn="ctr"/>
+            <a:endParaRPr/>
           </a:p>
         </p:txBody>
       </p:sp>
@@ -7485,6 +7716,7 @@
           <a:lstStyle/>
           <a:p>
             <a:pPr algn="ctr"/>
+            <a:endParaRPr/>
           </a:p>
         </p:txBody>
       </p:sp>
@@ -7555,7 +7787,7 @@
               </a:spcAft>
             </a:pPr>
             <a:r>
-              <a:rPr b="0" sz="1200">
+              <a:rPr sz="1200" b="0">
                 <a:solidFill>
                   <a:srgbClr val="60A5FA"/>
                 </a:solidFill>
@@ -7564,7 +7796,7 @@
               <a:t>•  </a:t>
             </a:r>
             <a:r>
-              <a:rPr b="1" sz="1200">
+              <a:rPr sz="1200" b="1">
                 <a:solidFill>
                   <a:srgbClr val="E2E8F0"/>
                 </a:solidFill>
@@ -7573,7 +7805,7 @@
               <a:t>Poblado Inicial: </a:t>
             </a:r>
             <a:r>
-              <a:rPr b="0" sz="1200">
+              <a:rPr sz="1200" b="0">
                 <a:solidFill>
                   <a:srgbClr val="94A3B8"/>
                 </a:solidFill>
@@ -7592,7 +7824,7 @@
               </a:spcAft>
             </a:pPr>
             <a:r>
-              <a:rPr b="0" sz="1200">
+              <a:rPr sz="1200" b="0">
                 <a:solidFill>
                   <a:srgbClr val="60A5FA"/>
                 </a:solidFill>
@@ -7601,7 +7833,7 @@
               <a:t>•  </a:t>
             </a:r>
             <a:r>
-              <a:rPr b="1" sz="1200">
+              <a:rPr sz="1200" b="1">
                 <a:solidFill>
                   <a:srgbClr val="E2E8F0"/>
                 </a:solidFill>
@@ -7610,7 +7842,7 @@
               <a:t>Respaldo Completo: </a:t>
             </a:r>
             <a:r>
-              <a:rPr b="0" sz="1200">
+              <a:rPr sz="1200" b="0">
                 <a:solidFill>
                   <a:srgbClr val="94A3B8"/>
                 </a:solidFill>
@@ -7629,7 +7861,7 @@
               </a:spcAft>
             </a:pPr>
             <a:r>
-              <a:rPr b="0" sz="1200">
+              <a:rPr sz="1200" b="0">
                 <a:solidFill>
                   <a:srgbClr val="60A5FA"/>
                 </a:solidFill>
@@ -7638,7 +7870,7 @@
               <a:t>•  </a:t>
             </a:r>
             <a:r>
-              <a:rPr b="1" sz="1200">
+              <a:rPr sz="1200" b="1">
                 <a:solidFill>
                   <a:srgbClr val="E2E8F0"/>
                 </a:solidFill>
@@ -7647,7 +7879,7 @@
               <a:t>Recuperación PITR: </a:t>
             </a:r>
             <a:r>
-              <a:rPr b="0" sz="1200">
+              <a:rPr sz="1200" b="0">
                 <a:solidFill>
                   <a:srgbClr val="94A3B8"/>
                 </a:solidFill>
@@ -7701,6 +7933,7 @@
           <a:lstStyle/>
           <a:p>
             <a:pPr algn="ctr"/>
+            <a:endParaRPr/>
           </a:p>
         </p:txBody>
       </p:sp>
@@ -7771,7 +8004,7 @@
               </a:spcAft>
             </a:pPr>
             <a:r>
-              <a:rPr b="0" sz="1200">
+              <a:rPr sz="1200" b="0">
                 <a:solidFill>
                   <a:srgbClr val="60A5FA"/>
                 </a:solidFill>
@@ -7780,7 +8013,7 @@
               <a:t>•  </a:t>
             </a:r>
             <a:r>
-              <a:rPr b="1" sz="1200">
+              <a:rPr sz="1200" b="1">
                 <a:solidFill>
                   <a:srgbClr val="E2E8F0"/>
                 </a:solidFill>
@@ -7789,7 +8022,7 @@
               <a:t>Inyección Concurrente: </a:t>
             </a:r>
             <a:r>
-              <a:rPr b="0" sz="1200">
+              <a:rPr sz="1200" b="0">
                 <a:solidFill>
                   <a:srgbClr val="94A3B8"/>
                 </a:solidFill>
@@ -7808,7 +8041,7 @@
               </a:spcAft>
             </a:pPr>
             <a:r>
-              <a:rPr b="0" sz="1200">
+              <a:rPr sz="1200" b="0">
                 <a:solidFill>
                   <a:srgbClr val="60A5FA"/>
                 </a:solidFill>
@@ -7817,7 +8050,7 @@
               <a:t>•  </a:t>
             </a:r>
             <a:r>
-              <a:rPr b="1" sz="1200">
+              <a:rPr sz="1200" b="1">
                 <a:solidFill>
                   <a:srgbClr val="E2E8F0"/>
                 </a:solidFill>
@@ -7826,7 +8059,7 @@
               <a:t>Transmisión en Streaming: </a:t>
             </a:r>
             <a:r>
-              <a:rPr b="0" sz="1200">
+              <a:rPr sz="1200" b="0">
                 <a:solidFill>
                   <a:srgbClr val="94A3B8"/>
                 </a:solidFill>
@@ -7845,7 +8078,7 @@
               </a:spcAft>
             </a:pPr>
             <a:r>
-              <a:rPr b="0" sz="1200">
+              <a:rPr sz="1200" b="0">
                 <a:solidFill>
                   <a:srgbClr val="60A5FA"/>
                 </a:solidFill>
@@ -7854,7 +8087,7 @@
               <a:t>•  </a:t>
             </a:r>
             <a:r>
-              <a:rPr b="1" sz="1200">
+              <a:rPr sz="1200" b="1">
                 <a:solidFill>
                   <a:srgbClr val="E2E8F0"/>
                 </a:solidFill>
@@ -7863,7 +8096,7 @@
               <a:t>Monitoreo en Vivo: </a:t>
             </a:r>
             <a:r>
-              <a:rPr b="0" sz="1200">
+              <a:rPr sz="1200" b="0">
                 <a:solidFill>
                   <a:srgbClr val="94A3B8"/>
                 </a:solidFill>
@@ -7917,6 +8150,7 @@
           <a:lstStyle/>
           <a:p>
             <a:pPr algn="ctr"/>
+            <a:endParaRPr/>
           </a:p>
         </p:txBody>
       </p:sp>
@@ -7987,7 +8221,7 @@
               </a:spcAft>
             </a:pPr>
             <a:r>
-              <a:rPr b="0" sz="1200">
+              <a:rPr sz="1200" b="0">
                 <a:solidFill>
                   <a:srgbClr val="60A5FA"/>
                 </a:solidFill>
@@ -7996,7 +8230,7 @@
               <a:t>•  </a:t>
             </a:r>
             <a:r>
-              <a:rPr b="1" sz="1200">
+              <a:rPr sz="1200" b="1">
                 <a:solidFill>
                   <a:srgbClr val="E2E8F0"/>
                 </a:solidFill>
@@ -8005,7 +8239,7 @@
               <a:t>Detección de Cuellos: </a:t>
             </a:r>
             <a:r>
-              <a:rPr b="0" sz="1200">
+              <a:rPr sz="1200" b="0">
                 <a:solidFill>
                   <a:srgbClr val="94A3B8"/>
                 </a:solidFill>
@@ -8024,7 +8258,7 @@
               </a:spcAft>
             </a:pPr>
             <a:r>
-              <a:rPr b="0" sz="1200">
+              <a:rPr sz="1200" b="0">
                 <a:solidFill>
                   <a:srgbClr val="60A5FA"/>
                 </a:solidFill>
@@ -8033,7 +8267,7 @@
               <a:t>•  </a:t>
             </a:r>
             <a:r>
-              <a:rPr b="1" sz="1200">
+              <a:rPr sz="1200" b="1">
                 <a:solidFill>
                   <a:srgbClr val="E2E8F0"/>
                 </a:solidFill>
@@ -8042,7 +8276,7 @@
               <a:t>Análisis de Planes: </a:t>
             </a:r>
             <a:r>
-              <a:rPr b="0" sz="1200">
+              <a:rPr sz="1200" b="0">
                 <a:solidFill>
                   <a:srgbClr val="94A3B8"/>
                 </a:solidFill>
@@ -8061,7 +8295,7 @@
               </a:spcAft>
             </a:pPr>
             <a:r>
-              <a:rPr b="0" sz="1200">
+              <a:rPr sz="1200" b="0">
                 <a:solidFill>
                   <a:srgbClr val="60A5FA"/>
                 </a:solidFill>
@@ -8070,7 +8304,7 @@
               <a:t>•  </a:t>
             </a:r>
             <a:r>
-              <a:rPr b="1" sz="1200">
+              <a:rPr sz="1200" b="1">
                 <a:solidFill>
                   <a:srgbClr val="E2E8F0"/>
                 </a:solidFill>
@@ -8079,7 +8313,7 @@
               <a:t>Verificación de Índices: </a:t>
             </a:r>
             <a:r>
-              <a:rPr b="0" sz="1200">
+              <a:rPr sz="1200" b="0">
                 <a:solidFill>
                   <a:srgbClr val="94A3B8"/>
                 </a:solidFill>
@@ -8099,7 +8333,7 @@
 </file>
 
 <file path=ppt/slides/slide17.xml><?xml version="1.0" encoding="utf-8"?>
-<p:sld xmlns:a="http://schemas.openxmlformats.org/drawingml/2006/main" xmlns:p="http://schemas.openxmlformats.org/presentationml/2006/main" xmlns:r="http://schemas.openxmlformats.org/officeDocument/2006/relationships">
+<p:sld xmlns:a="http://schemas.openxmlformats.org/drawingml/2006/main" xmlns:r="http://schemas.openxmlformats.org/officeDocument/2006/relationships" xmlns:p="http://schemas.openxmlformats.org/presentationml/2006/main">
   <p:cSld>
     <p:spTree>
       <p:nvGrpSpPr>
@@ -8107,7 +8341,14 @@
         <p:cNvGrpSpPr/>
         <p:nvPr/>
       </p:nvGrpSpPr>
-      <p:grpSpPr/>
+      <p:grpSpPr>
+        <a:xfrm>
+          <a:off x="0" y="0"/>
+          <a:ext cx="0" cy="0"/>
+          <a:chOff x="0" y="0"/>
+          <a:chExt cx="0" cy="0"/>
+        </a:xfrm>
+      </p:grpSpPr>
       <p:sp>
         <p:nvSpPr>
           <p:cNvPr id="2" name="Rectangle 1"/>
@@ -8148,6 +8389,7 @@
           <a:lstStyle/>
           <a:p>
             <a:pPr algn="ctr"/>
+            <a:endParaRPr/>
           </a:p>
         </p:txBody>
       </p:sp>
@@ -8266,6 +8508,7 @@
           <a:lstStyle/>
           <a:p>
             <a:pPr algn="ctr"/>
+            <a:endParaRPr/>
           </a:p>
         </p:txBody>
       </p:sp>
@@ -8336,7 +8579,7 @@
               </a:spcAft>
             </a:pPr>
             <a:r>
-              <a:rPr b="0" sz="1300">
+              <a:rPr sz="1300" b="0">
                 <a:solidFill>
                   <a:srgbClr val="60A5FA"/>
                 </a:solidFill>
@@ -8345,7 +8588,7 @@
               <a:t>•  </a:t>
             </a:r>
             <a:r>
-              <a:rPr b="1" sz="1300">
+              <a:rPr sz="1300" b="1">
                 <a:solidFill>
                   <a:srgbClr val="E2E8F0"/>
                 </a:solidFill>
@@ -8354,7 +8597,7 @@
               <a:t>1. Continuidad Operativa: </a:t>
             </a:r>
             <a:r>
-              <a:rPr b="0" sz="1300">
+              <a:rPr sz="1300" b="0">
                 <a:solidFill>
                   <a:srgbClr val="94A3B8"/>
                 </a:solidFill>
@@ -8373,7 +8616,7 @@
               </a:spcAft>
             </a:pPr>
             <a:r>
-              <a:rPr b="0" sz="1300">
+              <a:rPr sz="1300" b="0">
                 <a:solidFill>
                   <a:srgbClr val="60A5FA"/>
                 </a:solidFill>
@@ -8382,7 +8625,7 @@
               <a:t>•  </a:t>
             </a:r>
             <a:r>
-              <a:rPr b="1" sz="1300">
+              <a:rPr sz="1300" b="1">
                 <a:solidFill>
                   <a:srgbClr val="E2E8F0"/>
                 </a:solidFill>
@@ -8391,7 +8634,7 @@
               <a:t>2. Aislamiento de Observabilidad: </a:t>
             </a:r>
             <a:r>
-              <a:rPr b="0" sz="1300">
+              <a:rPr sz="1300" b="0">
                 <a:solidFill>
                   <a:srgbClr val="94A3B8"/>
                 </a:solidFill>
@@ -8410,7 +8653,7 @@
               </a:spcAft>
             </a:pPr>
             <a:r>
-              <a:rPr b="0" sz="1300">
+              <a:rPr sz="1300" b="0">
                 <a:solidFill>
                   <a:srgbClr val="60A5FA"/>
                 </a:solidFill>
@@ -8419,7 +8662,7 @@
               <a:t>•  </a:t>
             </a:r>
             <a:r>
-              <a:rPr b="1" sz="1300">
+              <a:rPr sz="1300" b="1">
                 <a:solidFill>
                   <a:srgbClr val="E2E8F0"/>
                 </a:solidFill>
@@ -8428,7 +8671,7 @@
               <a:t>3. Diagnóstico Científico: </a:t>
             </a:r>
             <a:r>
-              <a:rPr b="0" sz="1300">
+              <a:rPr sz="1300" b="0">
                 <a:solidFill>
                   <a:srgbClr val="94A3B8"/>
                 </a:solidFill>
@@ -8447,7 +8690,7 @@
               </a:spcAft>
             </a:pPr>
             <a:r>
-              <a:rPr b="0" sz="1300">
+              <a:rPr sz="1300" b="0">
                 <a:solidFill>
                   <a:srgbClr val="60A5FA"/>
                 </a:solidFill>
@@ -8456,7 +8699,7 @@
               <a:t>•  </a:t>
             </a:r>
             <a:r>
-              <a:rPr b="1" sz="1300">
+              <a:rPr sz="1300" b="1">
                 <a:solidFill>
                   <a:srgbClr val="E2E8F0"/>
                 </a:solidFill>
@@ -8465,7 +8708,7 @@
               <a:t>4. Viabilidad con Código Abierto: </a:t>
             </a:r>
             <a:r>
-              <a:rPr b="0" sz="1300">
+              <a:rPr sz="1300" b="0">
                 <a:solidFill>
                   <a:srgbClr val="94A3B8"/>
                 </a:solidFill>
@@ -8485,7 +8728,7 @@
 </file>
 
 <file path=ppt/slides/slide2.xml><?xml version="1.0" encoding="utf-8"?>
-<p:sld xmlns:a="http://schemas.openxmlformats.org/drawingml/2006/main" xmlns:p="http://schemas.openxmlformats.org/presentationml/2006/main" xmlns:r="http://schemas.openxmlformats.org/officeDocument/2006/relationships">
+<p:sld xmlns:a="http://schemas.openxmlformats.org/drawingml/2006/main" xmlns:r="http://schemas.openxmlformats.org/officeDocument/2006/relationships" xmlns:p="http://schemas.openxmlformats.org/presentationml/2006/main">
   <p:cSld>
     <p:spTree>
       <p:nvGrpSpPr>
@@ -8493,7 +8736,14 @@
         <p:cNvGrpSpPr/>
         <p:nvPr/>
       </p:nvGrpSpPr>
-      <p:grpSpPr/>
+      <p:grpSpPr>
+        <a:xfrm>
+          <a:off x="0" y="0"/>
+          <a:ext cx="0" cy="0"/>
+          <a:chOff x="0" y="0"/>
+          <a:chExt cx="0" cy="0"/>
+        </a:xfrm>
+      </p:grpSpPr>
       <p:sp>
         <p:nvSpPr>
           <p:cNvPr id="2" name="Rectangle 1"/>
@@ -8534,6 +8784,7 @@
           <a:lstStyle/>
           <a:p>
             <a:pPr algn="ctr"/>
+            <a:endParaRPr/>
           </a:p>
         </p:txBody>
       </p:sp>
@@ -8652,6 +8903,7 @@
           <a:lstStyle/>
           <a:p>
             <a:pPr algn="ctr"/>
+            <a:endParaRPr/>
           </a:p>
         </p:txBody>
       </p:sp>
@@ -8722,7 +8974,7 @@
               </a:spcAft>
             </a:pPr>
             <a:r>
-              <a:rPr b="0" sz="1200">
+              <a:rPr sz="1200" b="0">
                 <a:solidFill>
                   <a:srgbClr val="60A5FA"/>
                 </a:solidFill>
@@ -8731,7 +8983,7 @@
               <a:t>•  </a:t>
             </a:r>
             <a:r>
-              <a:rPr b="1" sz="1200">
+              <a:rPr sz="1200" b="1">
                 <a:solidFill>
                   <a:srgbClr val="E2E8F0"/>
                 </a:solidFill>
@@ -8740,7 +8992,7 @@
               <a:t>Riesgo Operativo: </a:t>
             </a:r>
             <a:r>
-              <a:rPr b="0" sz="1200">
+              <a:rPr sz="1200" b="0">
                 <a:solidFill>
                   <a:srgbClr val="94A3B8"/>
                 </a:solidFill>
@@ -8759,7 +9011,7 @@
               </a:spcAft>
             </a:pPr>
             <a:r>
-              <a:rPr b="0" sz="1200">
+              <a:rPr sz="1200" b="0">
                 <a:solidFill>
                   <a:srgbClr val="60A5FA"/>
                 </a:solidFill>
@@ -8768,7 +9020,7 @@
               <a:t>•  </a:t>
             </a:r>
             <a:r>
-              <a:rPr b="1" sz="1200">
+              <a:rPr sz="1200" b="1">
                 <a:solidFill>
                   <a:srgbClr val="E2E8F0"/>
                 </a:solidFill>
@@ -8777,7 +9029,7 @@
               <a:t>Limitación Tradicional: </a:t>
             </a:r>
             <a:r>
-              <a:rPr b="0" sz="1200">
+              <a:rPr sz="1200" b="0">
                 <a:solidFill>
                   <a:srgbClr val="94A3B8"/>
                 </a:solidFill>
@@ -8796,7 +9048,7 @@
               </a:spcAft>
             </a:pPr>
             <a:r>
-              <a:rPr b="0" sz="1200">
+              <a:rPr sz="1200" b="0">
                 <a:solidFill>
                   <a:srgbClr val="60A5FA"/>
                 </a:solidFill>
@@ -8805,7 +9057,7 @@
               <a:t>•  </a:t>
             </a:r>
             <a:r>
-              <a:rPr b="1" sz="1200">
+              <a:rPr sz="1200" b="1">
                 <a:solidFill>
                   <a:srgbClr val="E2E8F0"/>
                 </a:solidFill>
@@ -8814,7 +9066,7 @@
               <a:t>Objetivo: </a:t>
             </a:r>
             <a:r>
-              <a:rPr b="0" sz="1200">
+              <a:rPr sz="1200" b="0">
                 <a:solidFill>
                   <a:srgbClr val="94A3B8"/>
                 </a:solidFill>
@@ -8868,6 +9120,7 @@
           <a:lstStyle/>
           <a:p>
             <a:pPr algn="ctr"/>
+            <a:endParaRPr/>
           </a:p>
         </p:txBody>
       </p:sp>
@@ -8938,7 +9191,7 @@
               </a:spcAft>
             </a:pPr>
             <a:r>
-              <a:rPr b="0" sz="1200">
+              <a:rPr sz="1200" b="0">
                 <a:solidFill>
                   <a:srgbClr val="60A5FA"/>
                 </a:solidFill>
@@ -8947,7 +9200,7 @@
               <a:t>•  </a:t>
             </a:r>
             <a:r>
-              <a:rPr b="1" sz="1200">
+              <a:rPr sz="1200" b="1">
                 <a:solidFill>
                   <a:srgbClr val="E2E8F0"/>
                 </a:solidFill>
@@ -8956,7 +9209,7 @@
               <a:t>La Paradoja: </a:t>
             </a:r>
             <a:r>
-              <a:rPr b="0" sz="1200">
+              <a:rPr sz="1200" b="0">
                 <a:solidFill>
                   <a:srgbClr val="94A3B8"/>
                 </a:solidFill>
@@ -8975,7 +9228,7 @@
               </a:spcAft>
             </a:pPr>
             <a:r>
-              <a:rPr b="0" sz="1200">
+              <a:rPr sz="1200" b="0">
                 <a:solidFill>
                   <a:srgbClr val="60A5FA"/>
                 </a:solidFill>
@@ -8984,7 +9237,7 @@
               <a:t>•  </a:t>
             </a:r>
             <a:r>
-              <a:rPr b="1" sz="1200">
+              <a:rPr sz="1200" b="1">
                 <a:solidFill>
                   <a:srgbClr val="E2E8F0"/>
                 </a:solidFill>
@@ -8993,7 +9246,7 @@
               <a:t>Competencia de I/O: </a:t>
             </a:r>
             <a:r>
-              <a:rPr b="0" sz="1200">
+              <a:rPr sz="1200" b="0">
                 <a:solidFill>
                   <a:srgbClr val="94A3B8"/>
                 </a:solidFill>
@@ -9012,7 +9265,7 @@
               </a:spcAft>
             </a:pPr>
             <a:r>
-              <a:rPr b="0" sz="1200">
+              <a:rPr sz="1200" b="0">
                 <a:solidFill>
                   <a:srgbClr val="60A5FA"/>
                 </a:solidFill>
@@ -9021,7 +9274,7 @@
               <a:t>•  </a:t>
             </a:r>
             <a:r>
-              <a:rPr b="1" sz="1200">
+              <a:rPr sz="1200" b="1">
                 <a:solidFill>
                   <a:srgbClr val="E2E8F0"/>
                 </a:solidFill>
@@ -9030,7 +9283,7 @@
               <a:t>Objetivo: </a:t>
             </a:r>
             <a:r>
-              <a:rPr b="0" sz="1200">
+              <a:rPr sz="1200" b="0">
                 <a:solidFill>
                   <a:srgbClr val="94A3B8"/>
                 </a:solidFill>
@@ -9084,6 +9337,7 @@
           <a:lstStyle/>
           <a:p>
             <a:pPr algn="ctr"/>
+            <a:endParaRPr/>
           </a:p>
         </p:txBody>
       </p:sp>
@@ -9154,7 +9408,7 @@
               </a:spcAft>
             </a:pPr>
             <a:r>
-              <a:rPr b="0" sz="1200">
+              <a:rPr sz="1200" b="0">
                 <a:solidFill>
                   <a:srgbClr val="60A5FA"/>
                 </a:solidFill>
@@ -9163,7 +9417,7 @@
               <a:t>•  </a:t>
             </a:r>
             <a:r>
-              <a:rPr b="1" sz="1200">
+              <a:rPr sz="1200" b="1">
                 <a:solidFill>
                   <a:srgbClr val="E2E8F0"/>
                 </a:solidFill>
@@ -9172,7 +9426,7 @@
               <a:t>Degradación: </a:t>
             </a:r>
             <a:r>
-              <a:rPr b="0" sz="1200">
+              <a:rPr sz="1200" b="0">
                 <a:solidFill>
                   <a:srgbClr val="94A3B8"/>
                 </a:solidFill>
@@ -9191,7 +9445,7 @@
               </a:spcAft>
             </a:pPr>
             <a:r>
-              <a:rPr b="0" sz="1200">
+              <a:rPr sz="1200" b="0">
                 <a:solidFill>
                   <a:srgbClr val="60A5FA"/>
                 </a:solidFill>
@@ -9200,7 +9454,7 @@
               <a:t>•  </a:t>
             </a:r>
             <a:r>
-              <a:rPr b="1" sz="1200">
+              <a:rPr sz="1200" b="1">
                 <a:solidFill>
                   <a:srgbClr val="E2E8F0"/>
                 </a:solidFill>
@@ -9209,7 +9463,7 @@
               <a:t>Anti-patrones: </a:t>
             </a:r>
             <a:r>
-              <a:rPr b="0" sz="1200">
+              <a:rPr sz="1200" b="0">
                 <a:solidFill>
                   <a:srgbClr val="94A3B8"/>
                 </a:solidFill>
@@ -9228,7 +9482,7 @@
               </a:spcAft>
             </a:pPr>
             <a:r>
-              <a:rPr b="0" sz="1200">
+              <a:rPr sz="1200" b="0">
                 <a:solidFill>
                   <a:srgbClr val="60A5FA"/>
                 </a:solidFill>
@@ -9237,7 +9491,7 @@
               <a:t>•  </a:t>
             </a:r>
             <a:r>
-              <a:rPr b="1" sz="1200">
+              <a:rPr sz="1200" b="1">
                 <a:solidFill>
                   <a:srgbClr val="E2E8F0"/>
                 </a:solidFill>
@@ -9246,7 +9500,7 @@
               <a:t>Objetivo: </a:t>
             </a:r>
             <a:r>
-              <a:rPr b="0" sz="1200">
+              <a:rPr sz="1200" b="0">
                 <a:solidFill>
                   <a:srgbClr val="94A3B8"/>
                 </a:solidFill>
@@ -9266,7 +9520,7 @@
 </file>
 
 <file path=ppt/slides/slide3.xml><?xml version="1.0" encoding="utf-8"?>
-<p:sld xmlns:a="http://schemas.openxmlformats.org/drawingml/2006/main" xmlns:p="http://schemas.openxmlformats.org/presentationml/2006/main" xmlns:r="http://schemas.openxmlformats.org/officeDocument/2006/relationships">
+<p:sld xmlns:a="http://schemas.openxmlformats.org/drawingml/2006/main" xmlns:r="http://schemas.openxmlformats.org/officeDocument/2006/relationships" xmlns:p="http://schemas.openxmlformats.org/presentationml/2006/main">
   <p:cSld>
     <p:spTree>
       <p:nvGrpSpPr>
@@ -9274,7 +9528,14 @@
         <p:cNvGrpSpPr/>
         <p:nvPr/>
       </p:nvGrpSpPr>
-      <p:grpSpPr/>
+      <p:grpSpPr>
+        <a:xfrm>
+          <a:off x="0" y="0"/>
+          <a:ext cx="0" cy="0"/>
+          <a:chOff x="0" y="0"/>
+          <a:chExt cx="0" cy="0"/>
+        </a:xfrm>
+      </p:grpSpPr>
       <p:sp>
         <p:nvSpPr>
           <p:cNvPr id="2" name="Rectangle 1"/>
@@ -9315,6 +9576,7 @@
           <a:lstStyle/>
           <a:p>
             <a:pPr algn="ctr"/>
+            <a:endParaRPr/>
           </a:p>
         </p:txBody>
       </p:sp>
@@ -9433,6 +9695,7 @@
           <a:lstStyle/>
           <a:p>
             <a:pPr algn="ctr"/>
+            <a:endParaRPr/>
           </a:p>
         </p:txBody>
       </p:sp>
@@ -9503,7 +9766,7 @@
               </a:spcAft>
             </a:pPr>
             <a:r>
-              <a:rPr b="0" sz="1200">
+              <a:rPr sz="1200" b="0">
                 <a:solidFill>
                   <a:srgbClr val="60A5FA"/>
                 </a:solidFill>
@@ -9512,7 +9775,7 @@
               <a:t>•  </a:t>
             </a:r>
             <a:r>
-              <a:rPr b="1" sz="1200">
+              <a:rPr sz="1200" b="1">
                 <a:solidFill>
                   <a:srgbClr val="E2E8F0"/>
                 </a:solidFill>
@@ -9521,7 +9784,7 @@
               <a:t>db-primary (PostgreSQL 16): </a:t>
             </a:r>
             <a:r>
-              <a:rPr b="0" sz="1200">
+              <a:rPr sz="1200" b="0">
                 <a:solidFill>
                   <a:srgbClr val="94A3B8"/>
                 </a:solidFill>
@@ -9540,7 +9803,7 @@
               </a:spcAft>
             </a:pPr>
             <a:r>
-              <a:rPr b="0" sz="1200">
+              <a:rPr sz="1200" b="0">
                 <a:solidFill>
                   <a:srgbClr val="60A5FA"/>
                 </a:solidFill>
@@ -9549,7 +9812,7 @@
               <a:t>•  </a:t>
             </a:r>
             <a:r>
-              <a:rPr b="1" sz="1200">
+              <a:rPr sz="1200" b="1">
                 <a:solidFill>
                   <a:srgbClr val="E2E8F0"/>
                 </a:solidFill>
@@ -9558,7 +9821,7 @@
               <a:t>promtail-agent: </a:t>
             </a:r>
             <a:r>
-              <a:rPr b="0" sz="1200">
+              <a:rPr sz="1200" b="0">
                 <a:solidFill>
                   <a:srgbClr val="94A3B8"/>
                 </a:solidFill>
@@ -9577,7 +9840,7 @@
               </a:spcAft>
             </a:pPr>
             <a:r>
-              <a:rPr b="0" sz="1200">
+              <a:rPr sz="1200" b="0">
                 <a:solidFill>
                   <a:srgbClr val="60A5FA"/>
                 </a:solidFill>
@@ -9586,7 +9849,7 @@
               <a:t>•  </a:t>
             </a:r>
             <a:r>
-              <a:rPr b="1" sz="1200">
+              <a:rPr sz="1200" b="1">
                 <a:solidFill>
                   <a:srgbClr val="E2E8F0"/>
                 </a:solidFill>
@@ -9595,7 +9858,7 @@
               <a:t>loki-server: </a:t>
             </a:r>
             <a:r>
-              <a:rPr b="0" sz="1200">
+              <a:rPr sz="1200" b="0">
                 <a:solidFill>
                   <a:srgbClr val="94A3B8"/>
                 </a:solidFill>
@@ -9614,7 +9877,7 @@
               </a:spcAft>
             </a:pPr>
             <a:r>
-              <a:rPr b="0" sz="1200">
+              <a:rPr sz="1200" b="0">
                 <a:solidFill>
                   <a:srgbClr val="60A5FA"/>
                 </a:solidFill>
@@ -9623,7 +9886,7 @@
               <a:t>•  </a:t>
             </a:r>
             <a:r>
-              <a:rPr b="1" sz="1200">
+              <a:rPr sz="1200" b="1">
                 <a:solidFill>
                   <a:srgbClr val="E2E8F0"/>
                 </a:solidFill>
@@ -9632,7 +9895,7 @@
               <a:t>grafana-dashboard: </a:t>
             </a:r>
             <a:r>
-              <a:rPr b="0" sz="1200">
+              <a:rPr sz="1200" b="0">
                 <a:solidFill>
                   <a:srgbClr val="94A3B8"/>
                 </a:solidFill>
@@ -9651,7 +9914,7 @@
               </a:spcAft>
             </a:pPr>
             <a:r>
-              <a:rPr b="0" sz="1200">
+              <a:rPr sz="1200" b="0">
                 <a:solidFill>
                   <a:srgbClr val="60A5FA"/>
                 </a:solidFill>
@@ -9660,7 +9923,7 @@
               <a:t>•  </a:t>
             </a:r>
             <a:r>
-              <a:rPr b="1" sz="1200">
+              <a:rPr sz="1200" b="1">
                 <a:solidFill>
                   <a:srgbClr val="E2E8F0"/>
                 </a:solidFill>
@@ -9669,7 +9932,7 @@
               <a:t>backup_storage: </a:t>
             </a:r>
             <a:r>
-              <a:rPr b="0" sz="1200">
+              <a:rPr sz="1200" b="0">
                 <a:solidFill>
                   <a:srgbClr val="94A3B8"/>
                 </a:solidFill>
@@ -9723,6 +9986,7 @@
           <a:lstStyle/>
           <a:p>
             <a:pPr algn="ctr"/>
+            <a:endParaRPr/>
           </a:p>
         </p:txBody>
       </p:sp>
@@ -9793,7 +10057,7 @@
               </a:spcAft>
             </a:pPr>
             <a:r>
-              <a:rPr b="0" sz="1200">
+              <a:rPr sz="1200" b="0">
                 <a:solidFill>
                   <a:srgbClr val="60A5FA"/>
                 </a:solidFill>
@@ -9802,7 +10066,7 @@
               <a:t>•  </a:t>
             </a:r>
             <a:r>
-              <a:rPr b="1" sz="1200">
+              <a:rPr sz="1200" b="1">
                 <a:solidFill>
                   <a:srgbClr val="E2E8F0"/>
                 </a:solidFill>
@@ -9811,7 +10075,7 @@
               <a:t>Aislamiento de I/O: </a:t>
             </a:r>
             <a:r>
-              <a:rPr b="0" sz="1200">
+              <a:rPr sz="1200" b="0">
                 <a:solidFill>
                   <a:srgbClr val="94A3B8"/>
                 </a:solidFill>
@@ -9830,7 +10094,7 @@
               </a:spcAft>
             </a:pPr>
             <a:r>
-              <a:rPr b="0" sz="1200">
+              <a:rPr sz="1200" b="0">
                 <a:solidFill>
                   <a:srgbClr val="60A5FA"/>
                 </a:solidFill>
@@ -9839,7 +10103,7 @@
               <a:t>•  </a:t>
             </a:r>
             <a:r>
-              <a:rPr b="1" sz="1200">
+              <a:rPr sz="1200" b="1">
                 <a:solidFill>
                   <a:srgbClr val="E2E8F0"/>
                 </a:solidFill>
@@ -9848,7 +10112,7 @@
               <a:t>Análisis Post-Mortem: </a:t>
             </a:r>
             <a:r>
-              <a:rPr b="0" sz="1200">
+              <a:rPr sz="1200" b="0">
                 <a:solidFill>
                   <a:srgbClr val="94A3B8"/>
                 </a:solidFill>
@@ -9867,7 +10131,7 @@
               </a:spcAft>
             </a:pPr>
             <a:r>
-              <a:rPr b="0" sz="1200">
+              <a:rPr sz="1200" b="0">
                 <a:solidFill>
                   <a:srgbClr val="60A5FA"/>
                 </a:solidFill>
@@ -9876,7 +10140,7 @@
               <a:t>•  </a:t>
             </a:r>
             <a:r>
-              <a:rPr b="1" sz="1200">
+              <a:rPr sz="1200" b="1">
                 <a:solidFill>
                   <a:srgbClr val="E2E8F0"/>
                 </a:solidFill>
@@ -9885,7 +10149,7 @@
               <a:t>Cero Presupuesto: </a:t>
             </a:r>
             <a:r>
-              <a:rPr b="0" sz="1200">
+              <a:rPr sz="1200" b="0">
                 <a:solidFill>
                   <a:srgbClr val="94A3B8"/>
                 </a:solidFill>
@@ -9904,7 +10168,7 @@
               </a:spcAft>
             </a:pPr>
             <a:r>
-              <a:rPr b="0" sz="1200">
+              <a:rPr sz="1200" b="0">
                 <a:solidFill>
                   <a:srgbClr val="60A5FA"/>
                 </a:solidFill>
@@ -9913,7 +10177,7 @@
               <a:t>•  </a:t>
             </a:r>
             <a:r>
-              <a:rPr b="1" sz="1200">
+              <a:rPr sz="1200" b="1">
                 <a:solidFill>
                   <a:srgbClr val="E2E8F0"/>
                 </a:solidFill>
@@ -9922,7 +10186,7 @@
               <a:t>Consistencia: </a:t>
             </a:r>
             <a:r>
-              <a:rPr b="0" sz="1200">
+              <a:rPr sz="1200" b="0">
                 <a:solidFill>
                   <a:srgbClr val="94A3B8"/>
                 </a:solidFill>
@@ -9942,7 +10206,7 @@
 </file>
 
 <file path=ppt/slides/slide4.xml><?xml version="1.0" encoding="utf-8"?>
-<p:sld xmlns:a="http://schemas.openxmlformats.org/drawingml/2006/main" xmlns:p="http://schemas.openxmlformats.org/presentationml/2006/main" xmlns:r="http://schemas.openxmlformats.org/officeDocument/2006/relationships">
+<p:sld xmlns:a="http://schemas.openxmlformats.org/drawingml/2006/main" xmlns:r="http://schemas.openxmlformats.org/officeDocument/2006/relationships" xmlns:p="http://schemas.openxmlformats.org/presentationml/2006/main">
   <p:cSld>
     <p:spTree>
       <p:nvGrpSpPr>
@@ -9950,7 +10214,14 @@
         <p:cNvGrpSpPr/>
         <p:nvPr/>
       </p:nvGrpSpPr>
-      <p:grpSpPr/>
+      <p:grpSpPr>
+        <a:xfrm>
+          <a:off x="0" y="0"/>
+          <a:ext cx="0" cy="0"/>
+          <a:chOff x="0" y="0"/>
+          <a:chExt cx="0" cy="0"/>
+        </a:xfrm>
+      </p:grpSpPr>
       <p:sp>
         <p:nvSpPr>
           <p:cNvPr id="2" name="Rectangle 1"/>
@@ -9991,6 +10262,7 @@
           <a:lstStyle/>
           <a:p>
             <a:pPr algn="ctr"/>
+            <a:endParaRPr/>
           </a:p>
         </p:txBody>
       </p:sp>
@@ -10109,6 +10381,7 @@
           <a:lstStyle/>
           <a:p>
             <a:pPr algn="ctr"/>
+            <a:endParaRPr/>
           </a:p>
         </p:txBody>
       </p:sp>
@@ -10179,7 +10452,7 @@
               </a:spcAft>
             </a:pPr>
             <a:r>
-              <a:rPr b="0" sz="1200">
+              <a:rPr sz="1200" b="0">
                 <a:solidFill>
                   <a:srgbClr val="60A5FA"/>
                 </a:solidFill>
@@ -10188,7 +10461,7 @@
               <a:t>•  </a:t>
             </a:r>
             <a:r>
-              <a:rPr b="1" sz="1200">
+              <a:rPr sz="1200" b="1">
                 <a:solidFill>
                   <a:srgbClr val="E2E8F0"/>
                 </a:solidFill>
@@ -10197,7 +10470,7 @@
               <a:t>Backup Total (Full): </a:t>
             </a:r>
             <a:r>
-              <a:rPr b="0" sz="1200">
+              <a:rPr sz="1200" b="0">
                 <a:solidFill>
                   <a:srgbClr val="94A3B8"/>
                 </a:solidFill>
@@ -10216,7 +10489,7 @@
               </a:spcAft>
             </a:pPr>
             <a:r>
-              <a:rPr b="0" sz="1200">
+              <a:rPr sz="1200" b="0">
                 <a:solidFill>
                   <a:srgbClr val="60A5FA"/>
                 </a:solidFill>
@@ -10225,7 +10498,7 @@
               <a:t>•  </a:t>
             </a:r>
             <a:r>
-              <a:rPr b="1" sz="1200">
+              <a:rPr sz="1200" b="1">
                 <a:solidFill>
                   <a:srgbClr val="E2E8F0"/>
                 </a:solidFill>
@@ -10234,7 +10507,7 @@
               <a:t>Backup Incremental: </a:t>
             </a:r>
             <a:r>
-              <a:rPr b="0" sz="1200">
+              <a:rPr sz="1200" b="0">
                 <a:solidFill>
                   <a:srgbClr val="94A3B8"/>
                 </a:solidFill>
@@ -10253,7 +10526,7 @@
               </a:spcAft>
             </a:pPr>
             <a:r>
-              <a:rPr b="0" sz="1200">
+              <a:rPr sz="1200" b="0">
                 <a:solidFill>
                   <a:srgbClr val="60A5FA"/>
                 </a:solidFill>
@@ -10262,7 +10535,7 @@
               <a:t>•  </a:t>
             </a:r>
             <a:r>
-              <a:rPr b="1" sz="1200">
+              <a:rPr sz="1200" b="1">
                 <a:solidFill>
                   <a:srgbClr val="E2E8F0"/>
                 </a:solidFill>
@@ -10271,7 +10544,7 @@
               <a:t>Backup Diferencial: </a:t>
             </a:r>
             <a:r>
-              <a:rPr b="0" sz="1200">
+              <a:rPr sz="1200" b="0">
                 <a:solidFill>
                   <a:srgbClr val="94A3B8"/>
                 </a:solidFill>
@@ -10290,7 +10563,7 @@
               </a:spcAft>
             </a:pPr>
             <a:r>
-              <a:rPr b="0" sz="1200">
+              <a:rPr sz="1200" b="0">
                 <a:solidFill>
                   <a:srgbClr val="60A5FA"/>
                 </a:solidFill>
@@ -10299,7 +10572,7 @@
               <a:t>•  </a:t>
             </a:r>
             <a:r>
-              <a:rPr b="1" sz="1200">
+              <a:rPr sz="1200" b="1">
                 <a:solidFill>
                   <a:srgbClr val="E2E8F0"/>
                 </a:solidFill>
@@ -10308,7 +10581,7 @@
               <a:t>Métrica RPO: </a:t>
             </a:r>
             <a:r>
-              <a:rPr b="0" sz="1200">
+              <a:rPr sz="1200" b="0">
                 <a:solidFill>
                   <a:srgbClr val="94A3B8"/>
                 </a:solidFill>
@@ -10327,7 +10600,7 @@
               </a:spcAft>
             </a:pPr>
             <a:r>
-              <a:rPr b="0" sz="1200">
+              <a:rPr sz="1200" b="0">
                 <a:solidFill>
                   <a:srgbClr val="60A5FA"/>
                 </a:solidFill>
@@ -10336,7 +10609,7 @@
               <a:t>•  </a:t>
             </a:r>
             <a:r>
-              <a:rPr b="1" sz="1200">
+              <a:rPr sz="1200" b="1">
                 <a:solidFill>
                   <a:srgbClr val="E2E8F0"/>
                 </a:solidFill>
@@ -10345,7 +10618,7 @@
               <a:t>Métrica RTO: </a:t>
             </a:r>
             <a:r>
-              <a:rPr b="0" sz="1200">
+              <a:rPr sz="1200" b="0">
                 <a:solidFill>
                   <a:srgbClr val="94A3B8"/>
                 </a:solidFill>
@@ -10389,7 +10662,7 @@
 </file>
 
 <file path=ppt/slides/slide5.xml><?xml version="1.0" encoding="utf-8"?>
-<p:sld xmlns:a="http://schemas.openxmlformats.org/drawingml/2006/main" xmlns:p="http://schemas.openxmlformats.org/presentationml/2006/main" xmlns:r="http://schemas.openxmlformats.org/officeDocument/2006/relationships">
+<p:sld xmlns:a="http://schemas.openxmlformats.org/drawingml/2006/main" xmlns:r="http://schemas.openxmlformats.org/officeDocument/2006/relationships" xmlns:p="http://schemas.openxmlformats.org/presentationml/2006/main">
   <p:cSld>
     <p:spTree>
       <p:nvGrpSpPr>
@@ -10397,7 +10670,14 @@
         <p:cNvGrpSpPr/>
         <p:nvPr/>
       </p:nvGrpSpPr>
-      <p:grpSpPr/>
+      <p:grpSpPr>
+        <a:xfrm>
+          <a:off x="0" y="0"/>
+          <a:ext cx="0" cy="0"/>
+          <a:chOff x="0" y="0"/>
+          <a:chExt cx="0" cy="0"/>
+        </a:xfrm>
+      </p:grpSpPr>
       <p:sp>
         <p:nvSpPr>
           <p:cNvPr id="2" name="Rectangle 1"/>
@@ -10438,6 +10718,7 @@
           <a:lstStyle/>
           <a:p>
             <a:pPr algn="ctr"/>
+            <a:endParaRPr/>
           </a:p>
         </p:txBody>
       </p:sp>
@@ -10556,6 +10837,7 @@
           <a:lstStyle/>
           <a:p>
             <a:pPr algn="ctr"/>
+            <a:endParaRPr/>
           </a:p>
         </p:txBody>
       </p:sp>
@@ -10626,7 +10908,7 @@
               </a:spcAft>
             </a:pPr>
             <a:r>
-              <a:rPr b="0" sz="1200">
+              <a:rPr sz="1200" b="0">
                 <a:solidFill>
                   <a:srgbClr val="60A5FA"/>
                 </a:solidFill>
@@ -10635,7 +10917,7 @@
               <a:t>•  </a:t>
             </a:r>
             <a:r>
-              <a:rPr b="1" sz="1200">
+              <a:rPr sz="1200" b="1">
                 <a:solidFill>
                   <a:srgbClr val="E2E8F0"/>
                 </a:solidFill>
@@ -10644,7 +10926,7 @@
               <a:t>Cuándo usar Backup Total: </a:t>
             </a:r>
             <a:r>
-              <a:rPr b="0" sz="1200">
+              <a:rPr sz="1200" b="0">
                 <a:solidFill>
                   <a:srgbClr val="94A3B8"/>
                 </a:solidFill>
@@ -10663,7 +10945,7 @@
               </a:spcAft>
             </a:pPr>
             <a:r>
-              <a:rPr b="0" sz="1200">
+              <a:rPr sz="1200" b="0">
                 <a:solidFill>
                   <a:srgbClr val="60A5FA"/>
                 </a:solidFill>
@@ -10672,7 +10954,7 @@
               <a:t>•  </a:t>
             </a:r>
             <a:r>
-              <a:rPr b="1" sz="1200">
+              <a:rPr sz="1200" b="1">
                 <a:solidFill>
                   <a:srgbClr val="E2E8F0"/>
                 </a:solidFill>
@@ -10681,7 +10963,7 @@
               <a:t>Cuándo usar Backup Diferencial: </a:t>
             </a:r>
             <a:r>
-              <a:rPr b="0" sz="1200">
+              <a:rPr sz="1200" b="0">
                 <a:solidFill>
                   <a:srgbClr val="94A3B8"/>
                 </a:solidFill>
@@ -10700,7 +10982,7 @@
               </a:spcAft>
             </a:pPr>
             <a:r>
-              <a:rPr b="0" sz="1200">
+              <a:rPr sz="1200" b="0">
                 <a:solidFill>
                   <a:srgbClr val="60A5FA"/>
                 </a:solidFill>
@@ -10709,7 +10991,7 @@
               <a:t>•  </a:t>
             </a:r>
             <a:r>
-              <a:rPr b="1" sz="1200">
+              <a:rPr sz="1200" b="1">
                 <a:solidFill>
                   <a:srgbClr val="E2E8F0"/>
                 </a:solidFill>
@@ -10718,7 +11000,7 @@
               <a:t>Cuándo usar Backup Incremental: </a:t>
             </a:r>
             <a:r>
-              <a:rPr b="0" sz="1200">
+              <a:rPr sz="1200" b="0">
                 <a:solidFill>
                   <a:srgbClr val="94A3B8"/>
                 </a:solidFill>
@@ -10737,7 +11019,7 @@
               </a:spcAft>
             </a:pPr>
             <a:r>
-              <a:rPr b="0" sz="1200">
+              <a:rPr sz="1200" b="0">
                 <a:solidFill>
                   <a:srgbClr val="60A5FA"/>
                 </a:solidFill>
@@ -10746,7 +11028,7 @@
               <a:t>•  </a:t>
             </a:r>
             <a:r>
-              <a:rPr b="1" sz="1200">
+              <a:rPr sz="1200" b="1">
                 <a:solidFill>
                   <a:srgbClr val="E2E8F0"/>
                 </a:solidFill>
@@ -10755,7 +11037,7 @@
               <a:t>Enfoque Híbrido Estándar: </a:t>
             </a:r>
             <a:r>
-              <a:rPr b="0" sz="1200">
+              <a:rPr sz="1200" b="0">
                 <a:solidFill>
                   <a:srgbClr val="94A3B8"/>
                 </a:solidFill>
@@ -10809,6 +11091,7 @@
           <a:lstStyle/>
           <a:p>
             <a:pPr algn="ctr"/>
+            <a:endParaRPr/>
           </a:p>
         </p:txBody>
       </p:sp>
@@ -10879,7 +11162,7 @@
               </a:spcAft>
             </a:pPr>
             <a:r>
-              <a:rPr b="0" sz="1200">
+              <a:rPr sz="1200" b="0">
                 <a:solidFill>
                   <a:srgbClr val="60A5FA"/>
                 </a:solidFill>
@@ -10888,7 +11171,7 @@
               <a:t>•  </a:t>
             </a:r>
             <a:r>
-              <a:rPr b="1" sz="1200">
+              <a:rPr sz="1200" b="1">
                 <a:solidFill>
                   <a:srgbClr val="E2E8F0"/>
                 </a:solidFill>
@@ -10897,7 +11180,7 @@
               <a:t>Sobrecarga de I/O en Producción: </a:t>
             </a:r>
             <a:r>
-              <a:rPr b="0" sz="1200">
+              <a:rPr sz="1200" b="0">
                 <a:solidFill>
                   <a:srgbClr val="94A3B8"/>
                 </a:solidFill>
@@ -10916,7 +11199,7 @@
               </a:spcAft>
             </a:pPr>
             <a:r>
-              <a:rPr b="0" sz="1200">
+              <a:rPr sz="1200" b="0">
                 <a:solidFill>
                   <a:srgbClr val="60A5FA"/>
                 </a:solidFill>
@@ -10925,7 +11208,7 @@
               <a:t>•  </a:t>
             </a:r>
             <a:r>
-              <a:rPr b="1" sz="1200">
+              <a:rPr sz="1200" b="1">
                 <a:solidFill>
                   <a:srgbClr val="E2E8F0"/>
                 </a:solidFill>
@@ -10934,7 +11217,7 @@
               <a:t>Espacio de Almacenamiento: </a:t>
             </a:r>
             <a:r>
-              <a:rPr b="0" sz="1200">
+              <a:rPr sz="1200" b="0">
                 <a:solidFill>
                   <a:srgbClr val="94A3B8"/>
                 </a:solidFill>
@@ -10953,7 +11236,7 @@
               </a:spcAft>
             </a:pPr>
             <a:r>
-              <a:rPr b="0" sz="1200">
+              <a:rPr sz="1200" b="0">
                 <a:solidFill>
                   <a:srgbClr val="60A5FA"/>
                 </a:solidFill>
@@ -10962,7 +11245,7 @@
               <a:t>•  </a:t>
             </a:r>
             <a:r>
-              <a:rPr b="1" sz="1200">
+              <a:rPr sz="1200" b="1">
                 <a:solidFill>
                   <a:srgbClr val="E2E8F0"/>
                 </a:solidFill>
@@ -10971,7 +11254,7 @@
               <a:t>Riesgo en la Restauración: </a:t>
             </a:r>
             <a:r>
-              <a:rPr b="0" sz="1200">
+              <a:rPr sz="1200" b="0">
                 <a:solidFill>
                   <a:srgbClr val="94A3B8"/>
                 </a:solidFill>
@@ -10990,7 +11273,7 @@
               </a:spcAft>
             </a:pPr>
             <a:r>
-              <a:rPr b="0" sz="1200">
+              <a:rPr sz="1200" b="0">
                 <a:solidFill>
                   <a:srgbClr val="60A5FA"/>
                 </a:solidFill>
@@ -10999,7 +11282,7 @@
               <a:t>•  </a:t>
             </a:r>
             <a:r>
-              <a:rPr b="1" sz="1200">
+              <a:rPr sz="1200" b="1">
                 <a:solidFill>
                   <a:srgbClr val="E2E8F0"/>
                 </a:solidFill>
@@ -11008,7 +11291,7 @@
               <a:t>Velocidad de Restauración (RTO): </a:t>
             </a:r>
             <a:r>
-              <a:rPr b="0" sz="1200">
+              <a:rPr sz="1200" b="0">
                 <a:solidFill>
                   <a:srgbClr val="94A3B8"/>
                 </a:solidFill>
@@ -11028,7 +11311,7 @@
 </file>
 
 <file path=ppt/slides/slide6.xml><?xml version="1.0" encoding="utf-8"?>
-<p:sld xmlns:a="http://schemas.openxmlformats.org/drawingml/2006/main" xmlns:p="http://schemas.openxmlformats.org/presentationml/2006/main" xmlns:r="http://schemas.openxmlformats.org/officeDocument/2006/relationships">
+<p:sld xmlns:a="http://schemas.openxmlformats.org/drawingml/2006/main" xmlns:r="http://schemas.openxmlformats.org/officeDocument/2006/relationships" xmlns:p="http://schemas.openxmlformats.org/presentationml/2006/main">
   <p:cSld>
     <p:spTree>
       <p:nvGrpSpPr>
@@ -11036,7 +11319,14 @@
         <p:cNvGrpSpPr/>
         <p:nvPr/>
       </p:nvGrpSpPr>
-      <p:grpSpPr/>
+      <p:grpSpPr>
+        <a:xfrm>
+          <a:off x="0" y="0"/>
+          <a:ext cx="0" cy="0"/>
+          <a:chOff x="0" y="0"/>
+          <a:chExt cx="0" cy="0"/>
+        </a:xfrm>
+      </p:grpSpPr>
       <p:sp>
         <p:nvSpPr>
           <p:cNvPr id="2" name="Rectangle 1"/>
@@ -11077,6 +11367,7 @@
           <a:lstStyle/>
           <a:p>
             <a:pPr algn="ctr"/>
+            <a:endParaRPr/>
           </a:p>
         </p:txBody>
       </p:sp>
@@ -11195,6 +11486,7 @@
           <a:lstStyle/>
           <a:p>
             <a:pPr algn="ctr"/>
+            <a:endParaRPr/>
           </a:p>
         </p:txBody>
       </p:sp>
@@ -11265,7 +11557,7 @@
               </a:spcAft>
             </a:pPr>
             <a:r>
-              <a:rPr b="0" sz="1200">
+              <a:rPr sz="1200" b="0">
                 <a:solidFill>
                   <a:srgbClr val="60A5FA"/>
                 </a:solidFill>
@@ -11274,7 +11566,7 @@
               <a:t>•  </a:t>
             </a:r>
             <a:r>
-              <a:rPr b="1" sz="1200">
+              <a:rPr sz="1200" b="1">
                 <a:solidFill>
                   <a:srgbClr val="E2E8F0"/>
                 </a:solidFill>
@@ -11283,7 +11575,7 @@
               <a:t>Estructura Física: </a:t>
             </a:r>
             <a:r>
-              <a:rPr b="0" sz="1200">
+              <a:rPr sz="1200" b="0">
                 <a:solidFill>
                   <a:srgbClr val="94A3B8"/>
                 </a:solidFill>
@@ -11302,7 +11594,7 @@
               </a:spcAft>
             </a:pPr>
             <a:r>
-              <a:rPr b="0" sz="1200">
+              <a:rPr sz="1200" b="0">
                 <a:solidFill>
                   <a:srgbClr val="60A5FA"/>
                 </a:solidFill>
@@ -11311,7 +11603,7 @@
               <a:t>•  </a:t>
             </a:r>
             <a:r>
-              <a:rPr b="1" sz="1200">
+              <a:rPr sz="1200" b="1">
                 <a:solidFill>
                   <a:srgbClr val="E2E8F0"/>
                 </a:solidFill>
@@ -11320,7 +11612,7 @@
               <a:t>Timeline ID (Primeros 8 dígitos): </a:t>
             </a:r>
             <a:r>
-              <a:rPr b="0" sz="1200">
+              <a:rPr sz="1200" b="0">
                 <a:solidFill>
                   <a:srgbClr val="94A3B8"/>
                 </a:solidFill>
@@ -11339,7 +11631,7 @@
               </a:spcAft>
             </a:pPr>
             <a:r>
-              <a:rPr b="0" sz="1200">
+              <a:rPr sz="1200" b="0">
                 <a:solidFill>
                   <a:srgbClr val="60A5FA"/>
                 </a:solidFill>
@@ -11348,7 +11640,7 @@
               <a:t>•  </a:t>
             </a:r>
             <a:r>
-              <a:rPr b="1" sz="1200">
+              <a:rPr sz="1200" b="1">
                 <a:solidFill>
                   <a:srgbClr val="E2E8F0"/>
                 </a:solidFill>
@@ -11357,7 +11649,7 @@
               <a:t>Log ID (Dígitos 9 al 16): </a:t>
             </a:r>
             <a:r>
-              <a:rPr b="0" sz="1200">
+              <a:rPr sz="1200" b="0">
                 <a:solidFill>
                   <a:srgbClr val="94A3B8"/>
                 </a:solidFill>
@@ -11376,7 +11668,7 @@
               </a:spcAft>
             </a:pPr>
             <a:r>
-              <a:rPr b="0" sz="1200">
+              <a:rPr sz="1200" b="0">
                 <a:solidFill>
                   <a:srgbClr val="60A5FA"/>
                 </a:solidFill>
@@ -11385,7 +11677,7 @@
               <a:t>•  </a:t>
             </a:r>
             <a:r>
-              <a:rPr b="1" sz="1200">
+              <a:rPr sz="1200" b="1">
                 <a:solidFill>
                   <a:srgbClr val="E2E8F0"/>
                 </a:solidFill>
@@ -11394,7 +11686,7 @@
               <a:t>Segmento LSN (Últimos 8 dígitos): </a:t>
             </a:r>
             <a:r>
-              <a:rPr b="0" sz="1200">
+              <a:rPr sz="1200" b="0">
                 <a:solidFill>
                   <a:srgbClr val="94A3B8"/>
                 </a:solidFill>
@@ -11413,7 +11705,7 @@
               </a:spcAft>
             </a:pPr>
             <a:r>
-              <a:rPr b="0" sz="1200">
+              <a:rPr sz="1200" b="0">
                 <a:solidFill>
                   <a:srgbClr val="60A5FA"/>
                 </a:solidFill>
@@ -11422,7 +11714,7 @@
               <a:t>•  </a:t>
             </a:r>
             <a:r>
-              <a:rPr b="1" sz="1200">
+              <a:rPr sz="1200" b="1">
                 <a:solidFill>
                   <a:srgbClr val="E2E8F0"/>
                 </a:solidFill>
@@ -11431,7 +11723,7 @@
               <a:t>Principio WAL Inviolable: </a:t>
             </a:r>
             <a:r>
-              <a:rPr b="0" sz="1200">
+              <a:rPr sz="1200" b="0">
                 <a:solidFill>
                   <a:srgbClr val="94A3B8"/>
                 </a:solidFill>
@@ -11485,6 +11777,7 @@
           <a:lstStyle/>
           <a:p>
             <a:pPr algn="ctr"/>
+            <a:endParaRPr/>
           </a:p>
         </p:txBody>
       </p:sp>
@@ -11555,7 +11848,7 @@
               </a:spcAft>
             </a:pPr>
             <a:r>
-              <a:rPr b="0" sz="1200">
+              <a:rPr sz="1200" b="0">
                 <a:solidFill>
                   <a:srgbClr val="60A5FA"/>
                 </a:solidFill>
@@ -11564,7 +11857,7 @@
               <a:t>•  </a:t>
             </a:r>
             <a:r>
-              <a:rPr b="1" sz="1200">
+              <a:rPr sz="1200" b="1">
                 <a:solidFill>
                   <a:srgbClr val="E2E8F0"/>
                 </a:solidFill>
@@ -11573,7 +11866,7 @@
               <a:t>Qué es archive_mode: </a:t>
             </a:r>
             <a:r>
-              <a:rPr b="0" sz="1200">
+              <a:rPr sz="1200" b="0">
                 <a:solidFill>
                   <a:srgbClr val="94A3B8"/>
                 </a:solidFill>
@@ -11592,7 +11885,7 @@
               </a:spcAft>
             </a:pPr>
             <a:r>
-              <a:rPr b="0" sz="1200">
+              <a:rPr sz="1200" b="0">
                 <a:solidFill>
                   <a:srgbClr val="60A5FA"/>
                 </a:solidFill>
@@ -11601,7 +11894,7 @@
               <a:t>•  </a:t>
             </a:r>
             <a:r>
-              <a:rPr b="1" sz="1200">
+              <a:rPr sz="1200" b="1">
                 <a:solidFill>
                   <a:srgbClr val="E2E8F0"/>
                 </a:solidFill>
@@ -11610,7 +11903,7 @@
               <a:t>Parámetro POSTMASTER: </a:t>
             </a:r>
             <a:r>
-              <a:rPr b="0" sz="1200">
+              <a:rPr sz="1200" b="0">
                 <a:solidFill>
                   <a:srgbClr val="94A3B8"/>
                 </a:solidFill>
@@ -11629,7 +11922,7 @@
               </a:spcAft>
             </a:pPr>
             <a:r>
-              <a:rPr b="0" sz="1200">
+              <a:rPr sz="1200" b="0">
                 <a:solidFill>
                   <a:srgbClr val="60A5FA"/>
                 </a:solidFill>
@@ -11638,7 +11931,7 @@
               <a:t>•  </a:t>
             </a:r>
             <a:r>
-              <a:rPr b="1" sz="1200">
+              <a:rPr sz="1200" b="1">
                 <a:solidFill>
                   <a:srgbClr val="E2E8F0"/>
                 </a:solidFill>
@@ -11647,7 +11940,7 @@
               <a:t>Mecanismo Reactivo: </a:t>
             </a:r>
             <a:r>
-              <a:rPr b="0" sz="1200">
+              <a:rPr sz="1200" b="0">
                 <a:solidFill>
                   <a:srgbClr val="94A3B8"/>
                 </a:solidFill>
@@ -11666,7 +11959,7 @@
               </a:spcAft>
             </a:pPr>
             <a:r>
-              <a:rPr b="0" sz="1200">
+              <a:rPr sz="1200" b="0">
                 <a:solidFill>
                   <a:srgbClr val="60A5FA"/>
                 </a:solidFill>
@@ -11675,7 +11968,7 @@
               <a:t>•  </a:t>
             </a:r>
             <a:r>
-              <a:rPr b="1" sz="1200">
+              <a:rPr sz="1200" b="1">
                 <a:solidFill>
                   <a:srgbClr val="E2E8F0"/>
                 </a:solidFill>
@@ -11684,7 +11977,7 @@
               <a:t>Monitoreo con pg_stat_archiver: </a:t>
             </a:r>
             <a:r>
-              <a:rPr b="0" sz="1200">
+              <a:rPr sz="1200" b="0">
                 <a:solidFill>
                   <a:srgbClr val="94A3B8"/>
                 </a:solidFill>
@@ -11704,7 +11997,7 @@
 </file>
 
 <file path=ppt/slides/slide7.xml><?xml version="1.0" encoding="utf-8"?>
-<p:sld xmlns:a="http://schemas.openxmlformats.org/drawingml/2006/main" xmlns:p="http://schemas.openxmlformats.org/presentationml/2006/main" xmlns:r="http://schemas.openxmlformats.org/officeDocument/2006/relationships">
+<p:sld xmlns:a="http://schemas.openxmlformats.org/drawingml/2006/main" xmlns:r="http://schemas.openxmlformats.org/officeDocument/2006/relationships" xmlns:p="http://schemas.openxmlformats.org/presentationml/2006/main">
   <p:cSld>
     <p:spTree>
       <p:nvGrpSpPr>
@@ -11712,7 +12005,14 @@
         <p:cNvGrpSpPr/>
         <p:nvPr/>
       </p:nvGrpSpPr>
-      <p:grpSpPr/>
+      <p:grpSpPr>
+        <a:xfrm>
+          <a:off x="0" y="0"/>
+          <a:ext cx="0" cy="0"/>
+          <a:chOff x="0" y="0"/>
+          <a:chExt cx="0" cy="0"/>
+        </a:xfrm>
+      </p:grpSpPr>
       <p:sp>
         <p:nvSpPr>
           <p:cNvPr id="2" name="Rectangle 1"/>
@@ -11753,6 +12053,7 @@
           <a:lstStyle/>
           <a:p>
             <a:pPr algn="ctr"/>
+            <a:endParaRPr/>
           </a:p>
         </p:txBody>
       </p:sp>
@@ -11871,6 +12172,7 @@
           <a:lstStyle/>
           <a:p>
             <a:pPr algn="ctr"/>
+            <a:endParaRPr/>
           </a:p>
         </p:txBody>
       </p:sp>
@@ -11941,7 +12243,7 @@
               </a:spcAft>
             </a:pPr>
             <a:r>
-              <a:rPr b="0" sz="1200">
+              <a:rPr sz="1200" b="0">
                 <a:solidFill>
                   <a:srgbClr val="60A5FA"/>
                 </a:solidFill>
@@ -11950,7 +12252,7 @@
               <a:t>•  </a:t>
             </a:r>
             <a:r>
-              <a:rPr b="1" sz="1200">
+              <a:rPr sz="1200" b="1">
                 <a:solidFill>
                   <a:srgbClr val="E2E8F0"/>
                 </a:solidFill>
@@ -11959,7 +12261,7 @@
               <a:t>pg_dump con Formato Custom (-F c): </a:t>
             </a:r>
             <a:r>
-              <a:rPr b="0" sz="1200">
+              <a:rPr sz="1200" b="0">
                 <a:solidFill>
                   <a:srgbClr val="94A3B8"/>
                 </a:solidFill>
@@ -11978,7 +12280,7 @@
               </a:spcAft>
             </a:pPr>
             <a:r>
-              <a:rPr b="0" sz="1200">
+              <a:rPr sz="1200" b="0">
                 <a:solidFill>
                   <a:srgbClr val="60A5FA"/>
                 </a:solidFill>
@@ -11987,7 +12289,7 @@
               <a:t>•  </a:t>
             </a:r>
             <a:r>
-              <a:rPr b="1" sz="1200">
+              <a:rPr sz="1200" b="1">
                 <a:solidFill>
                   <a:srgbClr val="E2E8F0"/>
                 </a:solidFill>
@@ -11996,7 +12298,7 @@
               <a:t>Banderas -b (Blobs) y -v (Verbose): </a:t>
             </a:r>
             <a:r>
-              <a:rPr b="0" sz="1200">
+              <a:rPr sz="1200" b="0">
                 <a:solidFill>
                   <a:srgbClr val="94A3B8"/>
                 </a:solidFill>
@@ -12015,7 +12317,7 @@
               </a:spcAft>
             </a:pPr>
             <a:r>
-              <a:rPr b="0" sz="1200">
+              <a:rPr sz="1200" b="0">
                 <a:solidFill>
                   <a:srgbClr val="60A5FA"/>
                 </a:solidFill>
@@ -12024,7 +12326,7 @@
               <a:t>•  </a:t>
             </a:r>
             <a:r>
-              <a:rPr b="1" sz="1200">
+              <a:rPr sz="1200" b="1">
                 <a:solidFill>
                   <a:srgbClr val="E2E8F0"/>
                 </a:solidFill>
@@ -12033,7 +12335,7 @@
               <a:t>Sintaxis de archive_command: </a:t>
             </a:r>
             <a:r>
-              <a:rPr b="0" sz="1200">
+              <a:rPr sz="1200" b="0">
                 <a:solidFill>
                   <a:srgbClr val="94A3B8"/>
                 </a:solidFill>
@@ -12052,7 +12354,7 @@
               </a:spcAft>
             </a:pPr>
             <a:r>
-              <a:rPr b="0" sz="1200">
+              <a:rPr sz="1200" b="0">
                 <a:solidFill>
                   <a:srgbClr val="60A5FA"/>
                 </a:solidFill>
@@ -12061,7 +12363,7 @@
               <a:t>•  </a:t>
             </a:r>
             <a:r>
-              <a:rPr b="1" sz="1200">
+              <a:rPr sz="1200" b="1">
                 <a:solidFill>
                   <a:srgbClr val="E2E8F0"/>
                 </a:solidFill>
@@ -12070,7 +12372,7 @@
               <a:t>Rotación Manual (pg_switch_wal): </a:t>
             </a:r>
             <a:r>
-              <a:rPr b="0" sz="1200">
+              <a:rPr sz="1200" b="0">
                 <a:solidFill>
                   <a:srgbClr val="94A3B8"/>
                 </a:solidFill>
@@ -12124,6 +12426,7 @@
           <a:lstStyle/>
           <a:p>
             <a:pPr algn="ctr"/>
+            <a:endParaRPr/>
           </a:p>
         </p:txBody>
       </p:sp>
@@ -12194,7 +12497,7 @@
               </a:spcAft>
             </a:pPr>
             <a:r>
-              <a:rPr b="0" sz="1200">
+              <a:rPr sz="1200" b="0">
                 <a:solidFill>
                   <a:srgbClr val="60A5FA"/>
                 </a:solidFill>
@@ -12203,7 +12506,7 @@
               <a:t>•  </a:t>
             </a:r>
             <a:r>
-              <a:rPr b="1" sz="1200">
+              <a:rPr sz="1200" b="1">
                 <a:solidFill>
                   <a:srgbClr val="E2E8F0"/>
                 </a:solidFill>
@@ -12212,7 +12515,7 @@
               <a:t>Comando de Restauración: </a:t>
             </a:r>
             <a:r>
-              <a:rPr b="0" sz="1200">
+              <a:rPr sz="1200" b="0">
                 <a:solidFill>
                   <a:srgbClr val="94A3B8"/>
                 </a:solidFill>
@@ -12231,7 +12534,7 @@
               </a:spcAft>
             </a:pPr>
             <a:r>
-              <a:rPr b="0" sz="1200">
+              <a:rPr sz="1200" b="0">
                 <a:solidFill>
                   <a:srgbClr val="60A5FA"/>
                 </a:solidFill>
@@ -12240,7 +12543,7 @@
               <a:t>•  </a:t>
             </a:r>
             <a:r>
-              <a:rPr b="1" sz="1200">
+              <a:rPr sz="1200" b="1">
                 <a:solidFill>
                   <a:srgbClr val="E2E8F0"/>
                 </a:solidFill>
@@ -12249,7 +12552,7 @@
               <a:t>Bandera --clean: </a:t>
             </a:r>
             <a:r>
-              <a:rPr b="0" sz="1200">
+              <a:rPr sz="1200" b="0">
                 <a:solidFill>
                   <a:srgbClr val="94A3B8"/>
                 </a:solidFill>
@@ -12268,7 +12571,7 @@
               </a:spcAft>
             </a:pPr>
             <a:r>
-              <a:rPr b="0" sz="1200">
+              <a:rPr sz="1200" b="0">
                 <a:solidFill>
                   <a:srgbClr val="60A5FA"/>
                 </a:solidFill>
@@ -12277,7 +12580,7 @@
               <a:t>•  </a:t>
             </a:r>
             <a:r>
-              <a:rPr b="1" sz="1200">
+              <a:rPr sz="1200" b="1">
                 <a:solidFill>
                   <a:srgbClr val="E2E8F0"/>
                 </a:solidFill>
@@ -12286,7 +12589,7 @@
               <a:t>Bandera --if-exists: </a:t>
             </a:r>
             <a:r>
-              <a:rPr b="0" sz="1200">
+              <a:rPr sz="1200" b="0">
                 <a:solidFill>
                   <a:srgbClr val="94A3B8"/>
                 </a:solidFill>
@@ -12305,7 +12608,7 @@
               </a:spcAft>
             </a:pPr>
             <a:r>
-              <a:rPr b="0" sz="1200">
+              <a:rPr sz="1200" b="0">
                 <a:solidFill>
                   <a:srgbClr val="60A5FA"/>
                 </a:solidFill>
@@ -12314,7 +12617,7 @@
               <a:t>•  </a:t>
             </a:r>
             <a:r>
-              <a:rPr b="1" sz="1200">
+              <a:rPr sz="1200" b="1">
                 <a:solidFill>
                   <a:srgbClr val="E2E8F0"/>
                 </a:solidFill>
@@ -12323,7 +12626,7 @@
               <a:t>Bandera --no-owner: </a:t>
             </a:r>
             <a:r>
-              <a:rPr b="0" sz="1200">
+              <a:rPr sz="1200" b="0">
                 <a:solidFill>
                   <a:srgbClr val="94A3B8"/>
                 </a:solidFill>
@@ -12342,7 +12645,7 @@
               </a:spcAft>
             </a:pPr>
             <a:r>
-              <a:rPr b="0" sz="1200">
+              <a:rPr sz="1200" b="0">
                 <a:solidFill>
                   <a:srgbClr val="60A5FA"/>
                 </a:solidFill>
@@ -12351,7 +12654,7 @@
               <a:t>•  </a:t>
             </a:r>
             <a:r>
-              <a:rPr b="1" sz="1200">
+              <a:rPr sz="1200" b="1">
                 <a:solidFill>
                   <a:srgbClr val="E2E8F0"/>
                 </a:solidFill>
@@ -12360,7 +12663,7 @@
               <a:t>Consistencia Transaccional: </a:t>
             </a:r>
             <a:r>
-              <a:rPr b="0" sz="1200">
+              <a:rPr sz="1200" b="0">
                 <a:solidFill>
                   <a:srgbClr val="94A3B8"/>
                 </a:solidFill>
@@ -12380,7 +12683,7 @@
 </file>
 
 <file path=ppt/slides/slide8.xml><?xml version="1.0" encoding="utf-8"?>
-<p:sld xmlns:a="http://schemas.openxmlformats.org/drawingml/2006/main" xmlns:p="http://schemas.openxmlformats.org/presentationml/2006/main" xmlns:r="http://schemas.openxmlformats.org/officeDocument/2006/relationships">
+<p:sld xmlns:a="http://schemas.openxmlformats.org/drawingml/2006/main" xmlns:r="http://schemas.openxmlformats.org/officeDocument/2006/relationships" xmlns:p="http://schemas.openxmlformats.org/presentationml/2006/main">
   <p:cSld>
     <p:spTree>
       <p:nvGrpSpPr>
@@ -12388,7 +12691,14 @@
         <p:cNvGrpSpPr/>
         <p:nvPr/>
       </p:nvGrpSpPr>
-      <p:grpSpPr/>
+      <p:grpSpPr>
+        <a:xfrm>
+          <a:off x="0" y="0"/>
+          <a:ext cx="0" cy="0"/>
+          <a:chOff x="0" y="0"/>
+          <a:chExt cx="0" cy="0"/>
+        </a:xfrm>
+      </p:grpSpPr>
       <p:sp>
         <p:nvSpPr>
           <p:cNvPr id="2" name="Rectangle 1"/>
@@ -12429,6 +12739,7 @@
           <a:lstStyle/>
           <a:p>
             <a:pPr algn="ctr"/>
+            <a:endParaRPr/>
           </a:p>
         </p:txBody>
       </p:sp>
@@ -12547,6 +12858,7 @@
           <a:lstStyle/>
           <a:p>
             <a:pPr algn="ctr"/>
+            <a:endParaRPr/>
           </a:p>
         </p:txBody>
       </p:sp>
@@ -12617,7 +12929,7 @@
               </a:spcAft>
             </a:pPr>
             <a:r>
-              <a:rPr b="0" sz="1200">
+              <a:rPr sz="1200" b="0">
                 <a:solidFill>
                   <a:srgbClr val="60A5FA"/>
                 </a:solidFill>
@@ -12626,7 +12938,7 @@
               <a:t>•  </a:t>
             </a:r>
             <a:r>
-              <a:rPr b="1" sz="1200">
+              <a:rPr sz="1200" b="1">
                 <a:solidFill>
                   <a:srgbClr val="E2E8F0"/>
                 </a:solidFill>
@@ -12635,7 +12947,7 @@
               <a:t>Fase 1 (Respaldo Base): </a:t>
             </a:r>
             <a:r>
-              <a:rPr b="0" sz="1200">
+              <a:rPr sz="1200" b="0">
                 <a:solidFill>
                   <a:srgbClr val="94A3B8"/>
                 </a:solidFill>
@@ -12654,7 +12966,7 @@
               </a:spcAft>
             </a:pPr>
             <a:r>
-              <a:rPr b="0" sz="1200">
+              <a:rPr sz="1200" b="0">
                 <a:solidFill>
                   <a:srgbClr val="60A5FA"/>
                 </a:solidFill>
@@ -12663,7 +12975,7 @@
               <a:t>•  </a:t>
             </a:r>
             <a:r>
-              <a:rPr b="1" sz="1200">
+              <a:rPr sz="1200" b="1">
                 <a:solidFill>
                   <a:srgbClr val="E2E8F0"/>
                 </a:solidFill>
@@ -12672,7 +12984,7 @@
               <a:t>Fase 2 (Transacción Crítica): </a:t>
             </a:r>
             <a:r>
-              <a:rPr b="0" sz="1200">
+              <a:rPr sz="1200" b="0">
                 <a:solidFill>
                   <a:srgbClr val="94A3B8"/>
                 </a:solidFill>
@@ -12691,7 +13003,7 @@
               </a:spcAft>
             </a:pPr>
             <a:r>
-              <a:rPr b="0" sz="1200">
+              <a:rPr sz="1200" b="0">
                 <a:solidFill>
                   <a:srgbClr val="60A5FA"/>
                 </a:solidFill>
@@ -12700,7 +13012,7 @@
               <a:t>•  </a:t>
             </a:r>
             <a:r>
-              <a:rPr b="1" sz="1200">
+              <a:rPr sz="1200" b="1">
                 <a:solidFill>
                   <a:srgbClr val="E2E8F0"/>
                 </a:solidFill>
@@ -12709,7 +13021,7 @@
               <a:t>Fase 3 (Desastre Simulado): </a:t>
             </a:r>
             <a:r>
-              <a:rPr b="0" sz="1200">
+              <a:rPr sz="1200" b="0">
                 <a:solidFill>
                   <a:srgbClr val="94A3B8"/>
                 </a:solidFill>
@@ -12728,7 +13040,7 @@
               </a:spcAft>
             </a:pPr>
             <a:r>
-              <a:rPr b="0" sz="1200">
+              <a:rPr sz="1200" b="0">
                 <a:solidFill>
                   <a:srgbClr val="60A5FA"/>
                 </a:solidFill>
@@ -12737,7 +13049,7 @@
               <a:t>•  </a:t>
             </a:r>
             <a:r>
-              <a:rPr b="1" sz="1200">
+              <a:rPr sz="1200" b="1">
                 <a:solidFill>
                   <a:srgbClr val="E2E8F0"/>
                 </a:solidFill>
@@ -12746,7 +13058,7 @@
               <a:t>Fase 4 (Verificación de Pérdida): </a:t>
             </a:r>
             <a:r>
-              <a:rPr b="0" sz="1200">
+              <a:rPr sz="1200" b="0">
                 <a:solidFill>
                   <a:srgbClr val="94A3B8"/>
                 </a:solidFill>
@@ -12765,7 +13077,7 @@
               </a:spcAft>
             </a:pPr>
             <a:r>
-              <a:rPr b="0" sz="1200">
+              <a:rPr sz="1200" b="0">
                 <a:solidFill>
                   <a:srgbClr val="60A5FA"/>
                 </a:solidFill>
@@ -12774,7 +13086,7 @@
               <a:t>•  </a:t>
             </a:r>
             <a:r>
-              <a:rPr b="1" sz="1200">
+              <a:rPr sz="1200" b="1">
                 <a:solidFill>
                   <a:srgbClr val="E2E8F0"/>
                 </a:solidFill>
@@ -12783,7 +13095,7 @@
               <a:t>Fase 5 (Restauración Exitosa): </a:t>
             </a:r>
             <a:r>
-              <a:rPr b="0" sz="1200">
+              <a:rPr sz="1200" b="0">
                 <a:solidFill>
                   <a:srgbClr val="94A3B8"/>
                 </a:solidFill>
@@ -12837,6 +13149,7 @@
           <a:lstStyle/>
           <a:p>
             <a:pPr algn="ctr"/>
+            <a:endParaRPr/>
           </a:p>
         </p:txBody>
       </p:sp>
@@ -12907,7 +13220,7 @@
               </a:spcAft>
             </a:pPr>
             <a:r>
-              <a:rPr b="0" sz="1200">
+              <a:rPr sz="1200" b="0">
                 <a:solidFill>
                   <a:srgbClr val="60A5FA"/>
                 </a:solidFill>
@@ -12916,7 +13229,7 @@
               <a:t>•  </a:t>
             </a:r>
             <a:r>
-              <a:rPr b="1" sz="1200">
+              <a:rPr sz="1200" b="1">
                 <a:solidFill>
                   <a:srgbClr val="E2E8F0"/>
                 </a:solidFill>
@@ -12925,7 +13238,7 @@
               <a:t>Recuperación a Punto Específico: </a:t>
             </a:r>
             <a:r>
-              <a:rPr b="0" sz="1200">
+              <a:rPr sz="1200" b="0">
                 <a:solidFill>
                   <a:srgbClr val="94A3B8"/>
                 </a:solidFill>
@@ -12944,7 +13257,7 @@
               </a:spcAft>
             </a:pPr>
             <a:r>
-              <a:rPr b="0" sz="1200">
+              <a:rPr sz="1200" b="0">
                 <a:solidFill>
                   <a:srgbClr val="60A5FA"/>
                 </a:solidFill>
@@ -12953,7 +13266,7 @@
               <a:t>•  </a:t>
             </a:r>
             <a:r>
-              <a:rPr b="1" sz="1200">
+              <a:rPr sz="1200" b="1">
                 <a:solidFill>
                   <a:srgbClr val="E2E8F0"/>
                 </a:solidFill>
@@ -12962,7 +13275,7 @@
               <a:t>recovery_target_time: </a:t>
             </a:r>
             <a:r>
-              <a:rPr b="0" sz="1200">
+              <a:rPr sz="1200" b="0">
                 <a:solidFill>
                   <a:srgbClr val="94A3B8"/>
                 </a:solidFill>
@@ -12981,7 +13294,7 @@
               </a:spcAft>
             </a:pPr>
             <a:r>
-              <a:rPr b="0" sz="1200">
+              <a:rPr sz="1200" b="0">
                 <a:solidFill>
                   <a:srgbClr val="60A5FA"/>
                 </a:solidFill>
@@ -12990,7 +13303,7 @@
               <a:t>•  </a:t>
             </a:r>
             <a:r>
-              <a:rPr b="1" sz="1200">
+              <a:rPr sz="1200" b="1">
                 <a:solidFill>
                   <a:srgbClr val="E2E8F0"/>
                 </a:solidFill>
@@ -12999,7 +13312,7 @@
               <a:t>recovery_target_lsn: </a:t>
             </a:r>
             <a:r>
-              <a:rPr b="0" sz="1200">
+              <a:rPr sz="1200" b="0">
                 <a:solidFill>
                   <a:srgbClr val="94A3B8"/>
                 </a:solidFill>
@@ -13018,7 +13331,7 @@
               </a:spcAft>
             </a:pPr>
             <a:r>
-              <a:rPr b="0" sz="1200">
+              <a:rPr sz="1200" b="0">
                 <a:solidFill>
                   <a:srgbClr val="60A5FA"/>
                 </a:solidFill>
@@ -13027,7 +13340,7 @@
               <a:t>•  </a:t>
             </a:r>
             <a:r>
-              <a:rPr b="1" sz="1200">
+              <a:rPr sz="1200" b="1">
                 <a:solidFill>
                   <a:srgbClr val="E2E8F0"/>
                 </a:solidFill>
@@ -13036,7 +13349,7 @@
               <a:t>Resiliencia Total: </a:t>
             </a:r>
             <a:r>
-              <a:rPr b="0" sz="1200">
+              <a:rPr sz="1200" b="0">
                 <a:solidFill>
                   <a:srgbClr val="94A3B8"/>
                 </a:solidFill>
@@ -13056,7 +13369,7 @@
 </file>
 
 <file path=ppt/slides/slide9.xml><?xml version="1.0" encoding="utf-8"?>
-<p:sld xmlns:a="http://schemas.openxmlformats.org/drawingml/2006/main" xmlns:p="http://schemas.openxmlformats.org/presentationml/2006/main" xmlns:r="http://schemas.openxmlformats.org/officeDocument/2006/relationships">
+<p:sld xmlns:a="http://schemas.openxmlformats.org/drawingml/2006/main" xmlns:r="http://schemas.openxmlformats.org/officeDocument/2006/relationships" xmlns:p="http://schemas.openxmlformats.org/presentationml/2006/main">
   <p:cSld>
     <p:spTree>
       <p:nvGrpSpPr>
@@ -13064,7 +13377,14 @@
         <p:cNvGrpSpPr/>
         <p:nvPr/>
       </p:nvGrpSpPr>
-      <p:grpSpPr/>
+      <p:grpSpPr>
+        <a:xfrm>
+          <a:off x="0" y="0"/>
+          <a:ext cx="0" cy="0"/>
+          <a:chOff x="0" y="0"/>
+          <a:chExt cx="0" cy="0"/>
+        </a:xfrm>
+      </p:grpSpPr>
       <p:sp>
         <p:nvSpPr>
           <p:cNvPr id="2" name="Rectangle 1"/>
@@ -13105,6 +13425,7 @@
           <a:lstStyle/>
           <a:p>
             <a:pPr algn="ctr"/>
+            <a:endParaRPr/>
           </a:p>
         </p:txBody>
       </p:sp>
@@ -13223,6 +13544,7 @@
           <a:lstStyle/>
           <a:p>
             <a:pPr algn="ctr"/>
+            <a:endParaRPr/>
           </a:p>
         </p:txBody>
       </p:sp>
@@ -13293,7 +13615,7 @@
               </a:spcAft>
             </a:pPr>
             <a:r>
-              <a:rPr b="0" sz="1200">
+              <a:rPr sz="1200" b="0">
                 <a:solidFill>
                   <a:srgbClr val="60A5FA"/>
                 </a:solidFill>
@@ -13302,7 +13624,7 @@
               <a:t>•  </a:t>
             </a:r>
             <a:r>
-              <a:rPr b="1" sz="1200">
+              <a:rPr sz="1200" b="1">
                 <a:solidFill>
                   <a:srgbClr val="E2E8F0"/>
                 </a:solidFill>
@@ -13311,7 +13633,7 @@
               <a:t>Copia Binaria Bit a Bit: </a:t>
             </a:r>
             <a:r>
-              <a:rPr b="0" sz="1200">
+              <a:rPr sz="1200" b="0">
                 <a:solidFill>
                   <a:srgbClr val="94A3B8"/>
                 </a:solidFill>
@@ -13330,7 +13652,7 @@
               </a:spcAft>
             </a:pPr>
             <a:r>
-              <a:rPr b="0" sz="1200">
+              <a:rPr sz="1200" b="0">
                 <a:solidFill>
                   <a:srgbClr val="60A5FA"/>
                 </a:solidFill>
@@ -13339,7 +13661,7 @@
               <a:t>•  </a:t>
             </a:r>
             <a:r>
-              <a:rPr b="1" sz="1200">
+              <a:rPr sz="1200" b="1">
                 <a:solidFill>
                   <a:srgbClr val="E2E8F0"/>
                 </a:solidFill>
@@ -13348,7 +13670,7 @@
               <a:t>Streaming de WALs (-Xs): </a:t>
             </a:r>
             <a:r>
-              <a:rPr b="0" sz="1200">
+              <a:rPr sz="1200" b="0">
                 <a:solidFill>
                   <a:srgbClr val="94A3B8"/>
                 </a:solidFill>
@@ -13367,7 +13689,7 @@
               </a:spcAft>
             </a:pPr>
             <a:r>
-              <a:rPr b="0" sz="1200">
+              <a:rPr sz="1200" b="0">
                 <a:solidFill>
                   <a:srgbClr val="60A5FA"/>
                 </a:solidFill>
@@ -13376,7 +13698,7 @@
               <a:t>•  </a:t>
             </a:r>
             <a:r>
-              <a:rPr b="1" sz="1200">
+              <a:rPr sz="1200" b="1">
                 <a:solidFill>
                   <a:srgbClr val="E2E8F0"/>
                 </a:solidFill>
@@ -13385,7 +13707,7 @@
               <a:t>Configuración de Réplicas (-R): </a:t>
             </a:r>
             <a:r>
-              <a:rPr b="0" sz="1200">
+              <a:rPr sz="1200" b="0">
                 <a:solidFill>
                   <a:srgbClr val="94A3B8"/>
                 </a:solidFill>
@@ -13404,7 +13726,7 @@
               </a:spcAft>
             </a:pPr>
             <a:r>
-              <a:rPr b="0" sz="1200">
+              <a:rPr sz="1200" b="0">
                 <a:solidFill>
                   <a:srgbClr val="60A5FA"/>
                 </a:solidFill>
@@ -13413,7 +13735,7 @@
               <a:t>•  </a:t>
             </a:r>
             <a:r>
-              <a:rPr b="1" sz="1200">
+              <a:rPr sz="1200" b="1">
                 <a:solidFill>
                   <a:srgbClr val="E2E8F0"/>
                 </a:solidFill>
@@ -13422,7 +13744,7 @@
               <a:t>Velocidad de Restauración: </a:t>
             </a:r>
             <a:r>
-              <a:rPr b="0" sz="1200">
+              <a:rPr sz="1200" b="0">
                 <a:solidFill>
                   <a:srgbClr val="94A3B8"/>
                 </a:solidFill>
@@ -13476,6 +13798,7 @@
           <a:lstStyle/>
           <a:p>
             <a:pPr algn="ctr"/>
+            <a:endParaRPr/>
           </a:p>
         </p:txBody>
       </p:sp>
@@ -13546,7 +13869,7 @@
               </a:spcAft>
             </a:pPr>
             <a:r>
-              <a:rPr b="0" sz="1200">
+              <a:rPr sz="1200" b="0">
                 <a:solidFill>
                   <a:srgbClr val="60A5FA"/>
                 </a:solidFill>
@@ -13555,7 +13878,7 @@
               <a:t>•  </a:t>
             </a:r>
             <a:r>
-              <a:rPr b="1" sz="1200">
+              <a:rPr sz="1200" b="1">
                 <a:solidFill>
                   <a:srgbClr val="E2E8F0"/>
                 </a:solidFill>
@@ -13564,7 +13887,7 @@
               <a:t>pgBackRest (Estándar de la Industria): </a:t>
             </a:r>
             <a:r>
-              <a:rPr b="0" sz="1200">
+              <a:rPr sz="1200" b="0">
                 <a:solidFill>
                   <a:srgbClr val="94A3B8"/>
                 </a:solidFill>
@@ -13583,7 +13906,7 @@
               </a:spcAft>
             </a:pPr>
             <a:r>
-              <a:rPr b="0" sz="1200">
+              <a:rPr sz="1200" b="0">
                 <a:solidFill>
                   <a:srgbClr val="60A5FA"/>
                 </a:solidFill>
@@ -13592,7 +13915,7 @@
               <a:t>•  </a:t>
             </a:r>
             <a:r>
-              <a:rPr b="1" sz="1200">
+              <a:rPr sz="1200" b="1">
                 <a:solidFill>
                   <a:srgbClr val="E2E8F0"/>
                 </a:solidFill>
@@ -13601,7 +13924,7 @@
               <a:t>Barman (Backup &amp; Recovery Manager): </a:t>
             </a:r>
             <a:r>
-              <a:rPr b="0" sz="1200">
+              <a:rPr sz="1200" b="0">
                 <a:solidFill>
                   <a:srgbClr val="94A3B8"/>
                 </a:solidFill>
@@ -13620,7 +13943,7 @@
               </a:spcAft>
             </a:pPr>
             <a:r>
-              <a:rPr b="0" sz="1200">
+              <a:rPr sz="1200" b="0">
                 <a:solidFill>
                   <a:srgbClr val="60A5FA"/>
                 </a:solidFill>
@@ -13629,7 +13952,7 @@
               <a:t>•  </a:t>
             </a:r>
             <a:r>
-              <a:rPr b="1" sz="1200">
+              <a:rPr sz="1200" b="1">
                 <a:solidFill>
                   <a:srgbClr val="E2E8F0"/>
                 </a:solidFill>
@@ -13638,7 +13961,7 @@
               <a:t>WAL-G (Cloud-Native): </a:t>
             </a:r>
             <a:r>
-              <a:rPr b="0" sz="1200">
+              <a:rPr sz="1200" b="0">
                 <a:solidFill>
                   <a:srgbClr val="94A3B8"/>
                 </a:solidFill>
@@ -13657,7 +13980,7 @@
               </a:spcAft>
             </a:pPr>
             <a:r>
-              <a:rPr b="0" sz="1200">
+              <a:rPr sz="1200" b="0">
                 <a:solidFill>
                   <a:srgbClr val="60A5FA"/>
                 </a:solidFill>
@@ -13666,7 +13989,7 @@
               <a:t>•  </a:t>
             </a:r>
             <a:r>
-              <a:rPr b="1" sz="1200">
+              <a:rPr sz="1200" b="1">
                 <a:solidFill>
                   <a:srgbClr val="E2E8F0"/>
                 </a:solidFill>
@@ -13675,7 +13998,7 @@
               <a:t>Snapshots de Almacenamiento (SAN/EBS): </a:t>
             </a:r>
             <a:r>
-              <a:rPr b="0" sz="1200">
+              <a:rPr sz="1200" b="0">
                 <a:solidFill>
                   <a:srgbClr val="94A3B8"/>
                 </a:solidFill>
